--- a/AutomaticDifferentiation.pptx
+++ b/AutomaticDifferentiation.pptx
@@ -4,6 +4,9 @@
   <p:sldMasterIdLst>
     <p:sldMasterId id="2147483648" r:id="rId1"/>
   </p:sldMasterIdLst>
+  <p:notesMasterIdLst>
+    <p:notesMasterId r:id="rId18"/>
+  </p:notesMasterIdLst>
   <p:sldIdLst>
     <p:sldId id="256" r:id="rId2"/>
     <p:sldId id="257" r:id="rId3"/>
@@ -22,10 +25,7 @@
     <p:sldId id="270" r:id="rId16"/>
     <p:sldId id="271" r:id="rId17"/>
   </p:sldIdLst>
-  <p:notesMasterIdLst>
-    <p:notesMasterId r:id="rId18"/>
-  </p:notesMasterIdLst>
-  <p:sldSz cx="9144000" cy="5143500"/>
+  <p:sldSz cx="9144000" cy="5143500" type="screen16x9"/>
   <p:notesSz cx="5143500" cy="9144000"/>
   <p:defaultTextStyle>
     <a:lvl1pPr marL="0" algn="l" defTabSz="914400" rtl="0" eaLnBrk="1" latinLnBrk="0" hangingPunct="1">
@@ -119,6 +119,11 @@
       </a:defRPr>
     </a:lvl9pPr>
   </p:defaultTextStyle>
+  <p:extLst>
+    <p:ext uri="{EFAFB233-063F-42B5-8137-9DF3F51BA10A}">
+      <p15:sldGuideLst xmlns:p15="http://schemas.microsoft.com/office/powerpoint/2012/main"/>
+    </p:ext>
+  </p:extLst>
 </p:presentation>
 </file>
 
@@ -144,234 +149,10 @@
           <a:chExt cx="0" cy="0"/>
         </a:xfrm>
       </p:grpSpPr>
-      <p:sp>
-        <p:nvSpPr>
-          <p:cNvPr id="2" name="Header Placeholder 1"/>
-          <p:cNvSpPr>
-            <a:spLocks noGrp="1"/>
-          </p:cNvSpPr>
-          <p:nvPr>
-            <p:ph type="hdr" sz="quarter"/>
-          </p:nvPr>
-        </p:nvSpPr>
-        <p:spPr>
-          <a:xfrm>
-            <a:off x="0" y="0"/>
-            <a:ext cx="2971800" cy="458788"/>
-          </a:xfrm>
-          <a:prstGeom prst="rect">
-            <a:avLst/>
-          </a:prstGeom>
-        </p:spPr>
-        <p:txBody>
-          <a:bodyPr vert="horz" lIns="91440" tIns="45720" rIns="91440" bIns="45720" rtlCol="0"/>
-          <a:lstStyle>
-            <a:lvl1pPr algn="l">
-              <a:defRPr sz="1200"/>
-            </a:lvl1pPr>
-          </a:lstStyle>
-          <a:p>
-            <a:endParaRPr lang="en-US"/>
-          </a:p>
-        </p:txBody>
-      </p:sp>
-      <p:sp>
-        <p:nvSpPr>
-          <p:cNvPr id="3" name="Date Placeholder 2"/>
-          <p:cNvSpPr>
-            <a:spLocks noGrp="1"/>
-          </p:cNvSpPr>
-          <p:nvPr>
-            <p:ph type="dt" idx="1"/>
-          </p:nvPr>
-        </p:nvSpPr>
-        <p:spPr>
-          <a:xfrm>
-            <a:off x="3884613" y="0"/>
-            <a:ext cx="2971800" cy="458788"/>
-          </a:xfrm>
-          <a:prstGeom prst="rect">
-            <a:avLst/>
-          </a:prstGeom>
-        </p:spPr>
-        <p:txBody>
-          <a:bodyPr vert="horz" lIns="91440" tIns="45720" rIns="91440" bIns="45720" rtlCol="0"/>
-          <a:lstStyle>
-            <a:lvl1pPr algn="r">
-              <a:defRPr sz="1200"/>
-            </a:lvl1pPr>
-          </a:lstStyle>
-          <a:p>
-            <a:fld id="{5282F153-3F37-0F45-9E97-73ACFA13230C}" type="datetimeFigureOut">
-              <a:rPr lang="en-US"/>
-              <a:t>7/23/19</a:t>
-            </a:fld>
-            <a:endParaRPr lang="en-US"/>
-          </a:p>
-        </p:txBody>
-      </p:sp>
-      <p:sp>
-        <p:nvSpPr>
-          <p:cNvPr id="4" name="Slide Image Placeholder 3"/>
-          <p:cNvSpPr>
-            <a:spLocks noGrp="1" noRot="1" noChangeAspect="1"/>
-          </p:cNvSpPr>
-          <p:nvPr>
-            <p:ph type="sldImg" idx="2"/>
-          </p:nvPr>
-        </p:nvSpPr>
-        <p:spPr>
-          <a:xfrm>
-            <a:off x="685800" y="1143000"/>
-            <a:ext cx="5486400" cy="3086100"/>
-          </a:xfrm>
-          <a:prstGeom prst="rect">
-            <a:avLst/>
-          </a:prstGeom>
-          <a:noFill/>
-          <a:ln w="12700">
-            <a:solidFill>
-              <a:prstClr val="black"/>
-            </a:solidFill>
-          </a:ln>
-        </p:spPr>
-        <p:txBody>
-          <a:bodyPr vert="horz" lIns="91440" tIns="45720" rIns="91440" bIns="45720" rtlCol="0" anchor="ctr"/>
-          <a:lstStyle/>
-          <a:p>
-            <a:endParaRPr lang="en-US"/>
-          </a:p>
-        </p:txBody>
-      </p:sp>
-      <p:sp>
-        <p:nvSpPr>
-          <p:cNvPr id="5" name="Notes Placeholder 4"/>
-          <p:cNvSpPr>
-            <a:spLocks noGrp="1"/>
-          </p:cNvSpPr>
-          <p:nvPr>
-            <p:ph type="body" sz="quarter" idx="3"/>
-          </p:nvPr>
-        </p:nvSpPr>
-        <p:spPr>
-          <a:xfrm>
-            <a:off x="685800" y="4400550"/>
-            <a:ext cx="5486400" cy="3600450"/>
-          </a:xfrm>
-          <a:prstGeom prst="rect">
-            <a:avLst/>
-          </a:prstGeom>
-        </p:spPr>
-        <p:txBody>
-          <a:bodyPr vert="horz" lIns="91440" tIns="45720" rIns="91440" bIns="45720" rtlCol="0"/>
-          <a:lstStyle/>
-          <a:p>
-            <a:pPr lvl="0"/>
-            <a:r>
-              <a:rPr lang="en-US"/>
-              <a:t>Click to edit Master text styles</a:t>
-            </a:r>
-          </a:p>
-          <a:p>
-            <a:pPr lvl="1"/>
-            <a:r>
-              <a:rPr lang="en-US"/>
-              <a:t>Second level</a:t>
-            </a:r>
-          </a:p>
-          <a:p>
-            <a:pPr lvl="2"/>
-            <a:r>
-              <a:rPr lang="en-US"/>
-              <a:t>Third level</a:t>
-            </a:r>
-          </a:p>
-          <a:p>
-            <a:pPr lvl="3"/>
-            <a:r>
-              <a:rPr lang="en-US"/>
-              <a:t>Fourth level</a:t>
-            </a:r>
-          </a:p>
-          <a:p>
-            <a:pPr lvl="4"/>
-            <a:r>
-              <a:rPr lang="en-US"/>
-              <a:t>Fifth level</a:t>
-            </a:r>
-          </a:p>
-        </p:txBody>
-      </p:sp>
-      <p:sp>
-        <p:nvSpPr>
-          <p:cNvPr id="6" name="Footer Placeholder 5"/>
-          <p:cNvSpPr>
-            <a:spLocks noGrp="1"/>
-          </p:cNvSpPr>
-          <p:nvPr>
-            <p:ph type="ftr" sz="quarter" idx="4"/>
-          </p:nvPr>
-        </p:nvSpPr>
-        <p:spPr>
-          <a:xfrm>
-            <a:off x="0" y="8685213"/>
-            <a:ext cx="2971800" cy="458787"/>
-          </a:xfrm>
-          <a:prstGeom prst="rect">
-            <a:avLst/>
-          </a:prstGeom>
-        </p:spPr>
-        <p:txBody>
-          <a:bodyPr vert="horz" lIns="91440" tIns="45720" rIns="91440" bIns="45720" rtlCol="0" anchor="b"/>
-          <a:lstStyle>
-            <a:lvl1pPr algn="l">
-              <a:defRPr sz="1200"/>
-            </a:lvl1pPr>
-          </a:lstStyle>
-          <a:p>
-            <a:endParaRPr lang="en-US"/>
-          </a:p>
-        </p:txBody>
-      </p:sp>
-      <p:sp>
-        <p:nvSpPr>
-          <p:cNvPr id="7" name="Slide Number Placeholder 6"/>
-          <p:cNvSpPr>
-            <a:spLocks noGrp="1"/>
-          </p:cNvSpPr>
-          <p:nvPr>
-            <p:ph type="sldNum" sz="quarter" idx="5"/>
-          </p:nvPr>
-        </p:nvSpPr>
-        <p:spPr>
-          <a:xfrm>
-            <a:off x="3884613" y="8685213"/>
-            <a:ext cx="2971800" cy="458787"/>
-          </a:xfrm>
-          <a:prstGeom prst="rect">
-            <a:avLst/>
-          </a:prstGeom>
-        </p:spPr>
-        <p:txBody>
-          <a:bodyPr vert="horz" lIns="91440" tIns="45720" rIns="91440" bIns="45720" rtlCol="0" anchor="b"/>
-          <a:lstStyle>
-            <a:lvl1pPr algn="r">
-              <a:defRPr sz="1200"/>
-            </a:lvl1pPr>
-          </a:lstStyle>
-          <a:p>
-            <a:fld id="{CE5E9CC1-C706-0F49-92D6-E571CC5EEA8F}" type="slidenum">
-              <a:rPr lang="en-US"/>
-              <a:t>‹#›</a:t>
-            </a:fld>
-            <a:endParaRPr lang="en-US"/>
-          </a:p>
-        </p:txBody>
-      </p:sp>
     </p:spTree>
     <p:extLst>
       <p:ext uri="{BB962C8B-B14F-4D97-AF65-F5344CB8AC3E}">
-        <p14:creationId xmlns:p14="http://schemas.microsoft.com/office/powerpoint/2010/main" val="1024086991"/>
+        <p14:creationId xmlns:p14="http://schemas.microsoft.com/office/powerpoint/2010/main" val="749705251"/>
       </p:ext>
     </p:extLst>
   </p:cSld>
@@ -515,10 +296,6 @@
           <a:bodyPr/>
           <a:lstStyle/>
           <a:p>
-            <a:r>
-              <a:rPr lang="en-US" dirty="0"/>
-              <a:t/>
-            </a:r>
             <a:endParaRPr lang="en-US" dirty="0"/>
           </a:p>
         </p:txBody>
@@ -603,10 +380,6 @@
           <a:bodyPr/>
           <a:lstStyle/>
           <a:p>
-            <a:r>
-              <a:rPr lang="en-US" dirty="0"/>
-              <a:t/>
-            </a:r>
             <a:endParaRPr lang="en-US" dirty="0"/>
           </a:p>
         </p:txBody>
@@ -691,10 +464,6 @@
           <a:bodyPr/>
           <a:lstStyle/>
           <a:p>
-            <a:r>
-              <a:rPr lang="en-US" dirty="0"/>
-              <a:t/>
-            </a:r>
             <a:endParaRPr lang="en-US" dirty="0"/>
           </a:p>
         </p:txBody>
@@ -779,10 +548,6 @@
           <a:bodyPr/>
           <a:lstStyle/>
           <a:p>
-            <a:r>
-              <a:rPr lang="en-US" dirty="0"/>
-              <a:t/>
-            </a:r>
             <a:endParaRPr lang="en-US" dirty="0"/>
           </a:p>
         </p:txBody>
@@ -867,10 +632,6 @@
           <a:bodyPr/>
           <a:lstStyle/>
           <a:p>
-            <a:r>
-              <a:rPr lang="en-US" dirty="0"/>
-              <a:t/>
-            </a:r>
             <a:endParaRPr lang="en-US" dirty="0"/>
           </a:p>
         </p:txBody>
@@ -955,10 +716,6 @@
           <a:bodyPr/>
           <a:lstStyle/>
           <a:p>
-            <a:r>
-              <a:rPr lang="en-US" dirty="0"/>
-              <a:t/>
-            </a:r>
             <a:endParaRPr lang="en-US" dirty="0"/>
           </a:p>
         </p:txBody>
@@ -1043,10 +800,6 @@
           <a:bodyPr/>
           <a:lstStyle/>
           <a:p>
-            <a:r>
-              <a:rPr lang="en-US" dirty="0"/>
-              <a:t/>
-            </a:r>
             <a:endParaRPr lang="en-US" dirty="0"/>
           </a:p>
         </p:txBody>
@@ -1131,10 +884,6 @@
           <a:bodyPr/>
           <a:lstStyle/>
           <a:p>
-            <a:r>
-              <a:rPr lang="en-US" dirty="0"/>
-              <a:t/>
-            </a:r>
             <a:endParaRPr lang="en-US" dirty="0"/>
           </a:p>
         </p:txBody>
@@ -1219,10 +968,6 @@
           <a:bodyPr/>
           <a:lstStyle/>
           <a:p>
-            <a:r>
-              <a:rPr lang="en-US" dirty="0"/>
-              <a:t/>
-            </a:r>
             <a:endParaRPr lang="en-US" dirty="0"/>
           </a:p>
         </p:txBody>
@@ -1307,10 +1052,6 @@
           <a:bodyPr/>
           <a:lstStyle/>
           <a:p>
-            <a:r>
-              <a:rPr lang="en-US" dirty="0"/>
-              <a:t/>
-            </a:r>
             <a:endParaRPr lang="en-US" dirty="0"/>
           </a:p>
         </p:txBody>
@@ -1395,10 +1136,6 @@
           <a:bodyPr/>
           <a:lstStyle/>
           <a:p>
-            <a:r>
-              <a:rPr lang="en-US" dirty="0"/>
-              <a:t/>
-            </a:r>
             <a:endParaRPr lang="en-US" dirty="0"/>
           </a:p>
         </p:txBody>
@@ -1483,10 +1220,6 @@
           <a:bodyPr/>
           <a:lstStyle/>
           <a:p>
-            <a:r>
-              <a:rPr lang="en-US" dirty="0"/>
-              <a:t/>
-            </a:r>
             <a:endParaRPr lang="en-US" dirty="0"/>
           </a:p>
         </p:txBody>
@@ -1571,10 +1304,6 @@
           <a:bodyPr/>
           <a:lstStyle/>
           <a:p>
-            <a:r>
-              <a:rPr lang="en-US" dirty="0"/>
-              <a:t/>
-            </a:r>
             <a:endParaRPr lang="en-US" dirty="0"/>
           </a:p>
         </p:txBody>
@@ -1659,10 +1388,6 @@
           <a:bodyPr/>
           <a:lstStyle/>
           <a:p>
-            <a:r>
-              <a:rPr lang="en-US" dirty="0"/>
-              <a:t/>
-            </a:r>
             <a:endParaRPr lang="en-US" dirty="0"/>
           </a:p>
         </p:txBody>
@@ -1747,10 +1472,6 @@
           <a:bodyPr/>
           <a:lstStyle/>
           <a:p>
-            <a:r>
-              <a:rPr lang="en-US" dirty="0"/>
-              <a:t/>
-            </a:r>
             <a:endParaRPr lang="en-US" dirty="0"/>
           </a:p>
         </p:txBody>
@@ -1835,10 +1556,6 @@
           <a:bodyPr/>
           <a:lstStyle/>
           <a:p>
-            <a:r>
-              <a:rPr lang="en-US" dirty="0"/>
-              <a:t/>
-            </a:r>
             <a:endParaRPr lang="en-US" dirty="0"/>
           </a:p>
         </p:txBody>
@@ -1912,6 +1629,11 @@
 <file path=ppt/slideMasters/slideMaster1.xml><?xml version="1.0" encoding="utf-8"?>
 <p:sldMaster xmlns:a="http://schemas.openxmlformats.org/drawingml/2006/main" xmlns:r="http://schemas.openxmlformats.org/officeDocument/2006/relationships" xmlns:p="http://schemas.openxmlformats.org/presentationml/2006/main">
   <p:cSld>
+    <p:bg>
+      <p:bgRef idx="1001">
+        <a:schemeClr val="bg1"/>
+      </p:bgRef>
+    </p:bg>
     <p:spTree>
       <p:nvGrpSpPr>
         <p:cNvPr id="1" name=""/>
@@ -2194,6 +1916,7 @@
         <a:solidFill>
           <a:srgbClr val="0D1B2A"/>
         </a:solidFill>
+        <a:effectLst/>
       </p:bgPr>
     </p:bg>
     <p:spTree>
@@ -2306,7 +2029,7 @@
           <a:bodyPr wrap="square" lIns="0" tIns="0" rIns="0" bIns="0" rtlCol="0" anchor="ctr"/>
           <a:lstStyle/>
           <a:p>
-            <a:pPr indent="0" marL="0">
+            <a:pPr marL="0" indent="0">
               <a:buNone/>
             </a:pPr>
             <a:r>
@@ -2345,7 +2068,7 @@
           <a:bodyPr wrap="square" lIns="0" tIns="0" rIns="0" bIns="0" rtlCol="0" anchor="ctr"/>
           <a:lstStyle/>
           <a:p>
-            <a:pPr indent="0" marL="0">
+            <a:pPr marL="0" indent="0">
               <a:buNone/>
             </a:pPr>
             <a:r>
@@ -2384,7 +2107,7 @@
           <a:bodyPr wrap="square" lIns="0" tIns="0" rIns="0" bIns="0" rtlCol="0" anchor="ctr"/>
           <a:lstStyle/>
           <a:p>
-            <a:pPr indent="0" marL="0">
+            <a:pPr marL="0" indent="0">
               <a:buNone/>
             </a:pPr>
             <a:r>
@@ -2448,7 +2171,7 @@
           <a:bodyPr wrap="square" lIns="0" tIns="0" rIns="0" bIns="0" rtlCol="0" anchor="ctr"/>
           <a:lstStyle/>
           <a:p>
-            <a:pPr algn="ctr" indent="0" marL="0">
+            <a:pPr marL="0" indent="0" algn="ctr">
               <a:buNone/>
             </a:pPr>
             <a:r>
@@ -2512,7 +2235,7 @@
           <a:bodyPr wrap="square" lIns="0" tIns="0" rIns="0" bIns="0" rtlCol="0" anchor="ctr"/>
           <a:lstStyle/>
           <a:p>
-            <a:pPr algn="ctr" indent="0" marL="0">
+            <a:pPr marL="0" indent="0" algn="ctr">
               <a:buNone/>
             </a:pPr>
             <a:r>
@@ -2576,7 +2299,7 @@
           <a:bodyPr wrap="square" lIns="0" tIns="0" rIns="0" bIns="0" rtlCol="0" anchor="ctr"/>
           <a:lstStyle/>
           <a:p>
-            <a:pPr algn="ctr" indent="0" marL="0">
+            <a:pPr marL="0" indent="0" algn="ctr">
               <a:buNone/>
             </a:pPr>
             <a:r>
@@ -2640,7 +2363,7 @@
           <a:bodyPr wrap="square" lIns="0" tIns="0" rIns="0" bIns="0" rtlCol="0" anchor="ctr"/>
           <a:lstStyle/>
           <a:p>
-            <a:pPr algn="ctr" indent="0" marL="0">
+            <a:pPr marL="0" indent="0" algn="ctr">
               <a:buNone/>
             </a:pPr>
             <a:r>
@@ -2679,7 +2402,7 @@
           <a:bodyPr wrap="square" lIns="0" tIns="0" rIns="0" bIns="0" rtlCol="0" anchor="ctr"/>
           <a:lstStyle/>
           <a:p>
-            <a:pPr algn="ctr" indent="0" marL="0">
+            <a:pPr marL="0" indent="0" algn="ctr">
               <a:buNone/>
             </a:pPr>
             <a:r>
@@ -2718,7 +2441,7 @@
           <a:bodyPr wrap="square" lIns="0" tIns="0" rIns="0" bIns="0" rtlCol="0" anchor="ctr"/>
           <a:lstStyle/>
           <a:p>
-            <a:pPr algn="ctr" indent="0" marL="0">
+            <a:pPr marL="0" indent="0" algn="ctr">
               <a:buNone/>
             </a:pPr>
             <a:r>
@@ -2757,7 +2480,7 @@
           <a:bodyPr wrap="square" lIns="0" tIns="0" rIns="0" bIns="0" rtlCol="0" anchor="ctr"/>
           <a:lstStyle/>
           <a:p>
-            <a:pPr algn="ctr" indent="0" marL="0">
+            <a:pPr marL="0" indent="0" algn="ctr">
               <a:buNone/>
             </a:pPr>
             <a:r>
@@ -2796,7 +2519,7 @@
           <a:bodyPr wrap="square" lIns="0" tIns="0" rIns="0" bIns="0" rtlCol="0" anchor="ctr"/>
           <a:lstStyle/>
           <a:p>
-            <a:pPr algn="ctr" indent="0" marL="0">
+            <a:pPr marL="0" indent="0" algn="ctr">
               <a:buNone/>
             </a:pPr>
             <a:r>
@@ -2830,6 +2553,7 @@
         <a:solidFill>
           <a:srgbClr val="E8F4F8"/>
         </a:solidFill>
+        <a:effectLst/>
       </p:bgPr>
     </p:bg>
     <p:spTree>
@@ -2917,7 +2641,7 @@
           <a:bodyPr wrap="square" lIns="0" tIns="0" rIns="0" bIns="0" rtlCol="0" anchor="ctr"/>
           <a:lstStyle/>
           <a:p>
-            <a:pPr indent="0" marL="0">
+            <a:pPr marL="0" indent="0">
               <a:buNone/>
             </a:pPr>
             <a:r>
@@ -2956,7 +2680,7 @@
           <a:bodyPr wrap="square" lIns="0" tIns="0" rIns="0" bIns="0" rtlCol="0" anchor="ctr"/>
           <a:lstStyle/>
           <a:p>
-            <a:pPr indent="0" marL="0">
+            <a:pPr marL="0" indent="0">
               <a:buNone/>
             </a:pPr>
             <a:r>
@@ -2998,7 +2722,7 @@
             <a:prstDash val="solid"/>
           </a:ln>
           <a:effectLst>
-            <a:outerShdw sx="100000" sy="100000" kx="0" ky="0" algn="bl" rotWithShape="0" blurRad="63500" dist="25400" dir="8100000">
+            <a:outerShdw blurRad="63500" dist="25400" dir="8100000" algn="bl" rotWithShape="0">
               <a:srgbClr val="000000">
                 <a:alpha val="10000"/>
               </a:srgbClr>
@@ -3052,7 +2776,7 @@
           <a:bodyPr wrap="square" lIns="0" tIns="0" rIns="0" bIns="0" rtlCol="0" anchor="ctr"/>
           <a:lstStyle/>
           <a:p>
-            <a:pPr indent="0" marL="0">
+            <a:pPr marL="0" indent="0">
               <a:buNone/>
             </a:pPr>
             <a:r>
@@ -3069,7 +2793,7 @@
             <a:endParaRPr lang="en-US" sz="1300" dirty="0"/>
           </a:p>
           <a:p>
-            <a:pPr indent="0" marL="0">
+            <a:pPr marL="0" indent="0">
               <a:buNone/>
             </a:pPr>
             <a:r>
@@ -3108,7 +2832,7 @@
           <a:bodyPr wrap="square" lIns="0" tIns="0" rIns="0" bIns="0" rtlCol="0" anchor="ctr"/>
           <a:lstStyle/>
           <a:p>
-            <a:pPr indent="0" marL="0">
+            <a:pPr marL="0" indent="0">
               <a:buNone/>
             </a:pPr>
             <a:r>
@@ -3172,7 +2896,7 @@
           <a:bodyPr wrap="square" lIns="0" tIns="0" rIns="0" bIns="0" rtlCol="0" anchor="ctr"/>
           <a:lstStyle/>
           <a:p>
-            <a:pPr algn="ctr" indent="0" marL="0">
+            <a:pPr marL="0" indent="0" algn="ctr">
               <a:buNone/>
             </a:pPr>
             <a:r>
@@ -3236,7 +2960,7 @@
           <a:bodyPr wrap="square" lIns="0" tIns="0" rIns="0" bIns="0" rtlCol="0" anchor="ctr"/>
           <a:lstStyle/>
           <a:p>
-            <a:pPr algn="ctr" indent="0" marL="0">
+            <a:pPr marL="0" indent="0" algn="ctr">
               <a:buNone/>
             </a:pPr>
             <a:r>
@@ -3300,7 +3024,7 @@
           <a:bodyPr wrap="square" lIns="0" tIns="0" rIns="0" bIns="0" rtlCol="0" anchor="ctr"/>
           <a:lstStyle/>
           <a:p>
-            <a:pPr algn="ctr" indent="0" marL="0">
+            <a:pPr marL="0" indent="0" algn="ctr">
               <a:buNone/>
             </a:pPr>
             <a:r>
@@ -3350,7 +3074,7 @@
         <p:spPr>
           <a:xfrm>
             <a:off x="1828800" y="2395728"/>
-            <a:ext cx="731520" cy="-182880"/>
+            <a:ext cx="731520" cy="0"/>
           </a:xfrm>
           <a:prstGeom prst="line">
             <a:avLst/>
@@ -3408,7 +3132,7 @@
           <a:bodyPr wrap="square" lIns="0" tIns="0" rIns="0" bIns="0" rtlCol="0" anchor="ctr"/>
           <a:lstStyle/>
           <a:p>
-            <a:pPr indent="0" marL="0">
+            <a:pPr marL="0" indent="0">
               <a:buNone/>
             </a:pPr>
             <a:r>
@@ -3447,7 +3171,7 @@
           <a:bodyPr wrap="square" lIns="0" tIns="0" rIns="0" bIns="0" rtlCol="0" anchor="ctr"/>
           <a:lstStyle/>
           <a:p>
-            <a:pPr indent="0" marL="0">
+            <a:pPr marL="0" indent="0">
               <a:buNone/>
             </a:pPr>
             <a:r>
@@ -3511,7 +3235,7 @@
           <a:bodyPr wrap="square" lIns="76200" tIns="76200" rIns="76200" bIns="76200" rtlCol="0" anchor="ctr"/>
           <a:lstStyle/>
           <a:p>
-            <a:pPr indent="0" marL="0">
+            <a:pPr marL="0" indent="0">
               <a:buNone/>
             </a:pPr>
             <a:r>
@@ -3528,7 +3252,7 @@
             <a:endParaRPr lang="en-US" sz="1000" dirty="0"/>
           </a:p>
           <a:p>
-            <a:pPr indent="0" marL="0">
+            <a:pPr marL="0" indent="0">
               <a:buNone/>
             </a:pPr>
             <a:r>
@@ -3545,7 +3269,7 @@
             <a:endParaRPr lang="en-US" sz="1000" dirty="0"/>
           </a:p>
           <a:p>
-            <a:pPr indent="0" marL="0">
+            <a:pPr marL="0" indent="0">
               <a:buNone/>
             </a:pPr>
             <a:r>
@@ -3562,7 +3286,7 @@
             <a:endParaRPr lang="en-US" sz="1000" dirty="0"/>
           </a:p>
           <a:p>
-            <a:pPr indent="0" marL="0">
+            <a:pPr marL="0" indent="0">
               <a:buNone/>
             </a:pPr>
             <a:r>
@@ -3626,7 +3350,7 @@
           <a:bodyPr wrap="square" lIns="76200" tIns="76200" rIns="76200" bIns="76200" rtlCol="0" anchor="ctr"/>
           <a:lstStyle/>
           <a:p>
-            <a:pPr indent="0" marL="0">
+            <a:pPr marL="0" indent="0">
               <a:buNone/>
             </a:pPr>
             <a:r>
@@ -3643,7 +3367,7 @@
             <a:endParaRPr lang="en-US" sz="1000" dirty="0"/>
           </a:p>
           <a:p>
-            <a:pPr indent="0" marL="0">
+            <a:pPr marL="0" indent="0">
               <a:buNone/>
             </a:pPr>
             <a:r>
@@ -3660,7 +3384,7 @@
             <a:endParaRPr lang="en-US" sz="1000" dirty="0"/>
           </a:p>
           <a:p>
-            <a:pPr indent="0" marL="0">
+            <a:pPr marL="0" indent="0">
               <a:buNone/>
             </a:pPr>
             <a:r>
@@ -3677,7 +3401,7 @@
             <a:endParaRPr lang="en-US" sz="1000" dirty="0"/>
           </a:p>
           <a:p>
-            <a:pPr indent="0" marL="0">
+            <a:pPr marL="0" indent="0">
               <a:buNone/>
             </a:pPr>
             <a:r>
@@ -3741,7 +3465,7 @@
           <a:bodyPr wrap="square" lIns="0" tIns="0" rIns="0" bIns="0" rtlCol="0" anchor="ctr"/>
           <a:lstStyle/>
           <a:p>
-            <a:pPr algn="ctr" indent="0" marL="0">
+            <a:pPr marL="0" indent="0" algn="ctr">
               <a:buNone/>
             </a:pPr>
             <a:r>
@@ -3783,7 +3507,7 @@
             <a:prstDash val="solid"/>
           </a:ln>
           <a:effectLst>
-            <a:outerShdw sx="100000" sy="100000" kx="0" ky="0" algn="bl" rotWithShape="0" blurRad="63500" dist="25400" dir="8100000">
+            <a:outerShdw blurRad="63500" dist="25400" dir="8100000" algn="bl" rotWithShape="0">
               <a:srgbClr val="000000">
                 <a:alpha val="10000"/>
               </a:srgbClr>
@@ -3837,7 +3561,7 @@
           <a:bodyPr wrap="square" lIns="0" tIns="0" rIns="0" bIns="0" rtlCol="0" anchor="ctr"/>
           <a:lstStyle/>
           <a:p>
-            <a:pPr indent="0" marL="0">
+            <a:pPr marL="0" indent="0">
               <a:buNone/>
             </a:pPr>
             <a:r>
@@ -3876,7 +3600,7 @@
           <a:bodyPr wrap="square" lIns="0" tIns="0" rIns="0" bIns="0" rtlCol="0" anchor="ctr"/>
           <a:lstStyle/>
           <a:p>
-            <a:pPr indent="0" marL="0">
+            <a:pPr marL="0" indent="0">
               <a:buNone/>
             </a:pPr>
             <a:r>
@@ -3915,7 +3639,7 @@
           <a:bodyPr wrap="square" lIns="0" tIns="0" rIns="0" bIns="0" rtlCol="0" anchor="ctr"/>
           <a:lstStyle/>
           <a:p>
-            <a:pPr indent="0" marL="0">
+            <a:pPr marL="0" indent="0">
               <a:buNone/>
             </a:pPr>
             <a:r>
@@ -3954,7 +3678,7 @@
           <a:bodyPr wrap="square" lIns="0" tIns="0" rIns="0" bIns="0" rtlCol="0" anchor="ctr"/>
           <a:lstStyle/>
           <a:p>
-            <a:pPr indent="0" marL="0">
+            <a:pPr marL="0" indent="0">
               <a:buNone/>
             </a:pPr>
             <a:r>
@@ -3993,7 +3717,7 @@
           <a:bodyPr wrap="square" lIns="0" tIns="0" rIns="0" bIns="0" rtlCol="0" anchor="ctr"/>
           <a:lstStyle/>
           <a:p>
-            <a:pPr indent="0" marL="0">
+            <a:pPr marL="0" indent="0">
               <a:buNone/>
             </a:pPr>
             <a:r>
@@ -4032,7 +3756,7 @@
           <a:bodyPr wrap="square" lIns="0" tIns="0" rIns="0" bIns="0" rtlCol="0" anchor="ctr"/>
           <a:lstStyle/>
           <a:p>
-            <a:pPr indent="0" marL="0">
+            <a:pPr marL="0" indent="0">
               <a:buNone/>
             </a:pPr>
             <a:endParaRPr lang="en-US" sz="1000" dirty="0"/>
@@ -4060,7 +3784,7 @@
           <a:bodyPr wrap="square" lIns="0" tIns="0" rIns="0" bIns="0" rtlCol="0" anchor="ctr"/>
           <a:lstStyle/>
           <a:p>
-            <a:pPr indent="0" marL="0">
+            <a:pPr marL="0" indent="0">
               <a:buNone/>
             </a:pPr>
             <a:r>
@@ -4099,7 +3823,7 @@
           <a:bodyPr wrap="square" lIns="0" tIns="0" rIns="0" bIns="0" rtlCol="0" anchor="ctr"/>
           <a:lstStyle/>
           <a:p>
-            <a:pPr indent="0" marL="0">
+            <a:pPr marL="0" indent="0">
               <a:buNone/>
             </a:pPr>
             <a:r>
@@ -4138,7 +3862,7 @@
           <a:bodyPr wrap="square" lIns="0" tIns="0" rIns="0" bIns="0" rtlCol="0" anchor="ctr"/>
           <a:lstStyle/>
           <a:p>
-            <a:pPr indent="0" marL="0">
+            <a:pPr marL="0" indent="0">
               <a:buNone/>
             </a:pPr>
             <a:r>
@@ -4177,7 +3901,7 @@
           <a:bodyPr wrap="square" lIns="0" tIns="0" rIns="0" bIns="0" rtlCol="0" anchor="ctr"/>
           <a:lstStyle/>
           <a:p>
-            <a:pPr indent="0" marL="0">
+            <a:pPr marL="0" indent="0">
               <a:buNone/>
             </a:pPr>
             <a:r>
@@ -4216,7 +3940,7 @@
           <a:bodyPr wrap="square" lIns="0" tIns="0" rIns="0" bIns="0" rtlCol="0" anchor="ctr"/>
           <a:lstStyle/>
           <a:p>
-            <a:pPr indent="0" marL="0">
+            <a:pPr marL="0" indent="0">
               <a:buNone/>
             </a:pPr>
             <a:r>
@@ -4255,7 +3979,7 @@
           <a:bodyPr wrap="square" lIns="0" tIns="0" rIns="0" bIns="0" rtlCol="0" anchor="ctr"/>
           <a:lstStyle/>
           <a:p>
-            <a:pPr indent="0" marL="0">
+            <a:pPr marL="0" indent="0">
               <a:buNone/>
             </a:pPr>
             <a:endParaRPr lang="en-US" sz="1000" dirty="0"/>
@@ -4283,7 +4007,7 @@
           <a:bodyPr wrap="square" lIns="0" tIns="0" rIns="0" bIns="0" rtlCol="0" anchor="ctr"/>
           <a:lstStyle/>
           <a:p>
-            <a:pPr indent="0" marL="0">
+            <a:pPr marL="0" indent="0">
               <a:buNone/>
             </a:pPr>
             <a:r>
@@ -4322,7 +4046,7 @@
           <a:bodyPr wrap="square" lIns="0" tIns="0" rIns="0" bIns="0" rtlCol="0" anchor="ctr"/>
           <a:lstStyle/>
           <a:p>
-            <a:pPr indent="0" marL="0">
+            <a:pPr marL="0" indent="0">
               <a:buNone/>
             </a:pPr>
             <a:r>
@@ -4356,6 +4080,7 @@
         <a:solidFill>
           <a:srgbClr val="E8F4F8"/>
         </a:solidFill>
+        <a:effectLst/>
       </p:bgPr>
     </p:bg>
     <p:spTree>
@@ -4443,7 +4168,7 @@
           <a:bodyPr wrap="square" lIns="0" tIns="0" rIns="0" bIns="0" rtlCol="0" anchor="ctr"/>
           <a:lstStyle/>
           <a:p>
-            <a:pPr indent="0" marL="0">
+            <a:pPr marL="0" indent="0">
               <a:buNone/>
             </a:pPr>
             <a:r>
@@ -4507,7 +4232,7 @@
           <a:bodyPr wrap="square" lIns="0" tIns="0" rIns="0" bIns="0" rtlCol="0" anchor="ctr"/>
           <a:lstStyle/>
           <a:p>
-            <a:pPr indent="0" marL="0">
+            <a:pPr marL="0" indent="0">
               <a:buNone/>
             </a:pPr>
             <a:r>
@@ -4571,7 +4296,7 @@
           <a:bodyPr wrap="square" lIns="0" tIns="0" rIns="0" bIns="0" rtlCol="0" anchor="ctr"/>
           <a:lstStyle/>
           <a:p>
-            <a:pPr indent="0" marL="0">
+            <a:pPr marL="0" indent="0">
               <a:buNone/>
             </a:pPr>
             <a:r>
@@ -4635,7 +4360,7 @@
           <a:bodyPr wrap="square" lIns="0" tIns="0" rIns="0" bIns="0" rtlCol="0" anchor="ctr"/>
           <a:lstStyle/>
           <a:p>
-            <a:pPr indent="0" marL="0">
+            <a:pPr marL="0" indent="0">
               <a:buNone/>
             </a:pPr>
             <a:r>
@@ -4699,7 +4424,7 @@
           <a:bodyPr wrap="square" lIns="0" tIns="0" rIns="0" bIns="0" rtlCol="0" anchor="ctr"/>
           <a:lstStyle/>
           <a:p>
-            <a:pPr indent="0" marL="0">
+            <a:pPr marL="0" indent="0">
               <a:buNone/>
             </a:pPr>
             <a:r>
@@ -4763,7 +4488,7 @@
           <a:bodyPr wrap="square" lIns="0" tIns="0" rIns="0" bIns="0" rtlCol="0" anchor="ctr"/>
           <a:lstStyle/>
           <a:p>
-            <a:pPr indent="0" marL="0">
+            <a:pPr marL="0" indent="0">
               <a:buNone/>
             </a:pPr>
             <a:r>
@@ -4827,7 +4552,7 @@
           <a:bodyPr wrap="square" lIns="0" tIns="0" rIns="0" bIns="0" rtlCol="0" anchor="ctr"/>
           <a:lstStyle/>
           <a:p>
-            <a:pPr indent="0" marL="0">
+            <a:pPr marL="0" indent="0">
               <a:buNone/>
             </a:pPr>
             <a:r>
@@ -4891,7 +4616,7 @@
           <a:bodyPr wrap="square" lIns="0" tIns="0" rIns="0" bIns="0" rtlCol="0" anchor="ctr"/>
           <a:lstStyle/>
           <a:p>
-            <a:pPr indent="0" marL="0">
+            <a:pPr marL="0" indent="0">
               <a:buNone/>
             </a:pPr>
             <a:r>
@@ -4955,7 +4680,7 @@
           <a:bodyPr wrap="square" lIns="0" tIns="0" rIns="0" bIns="0" rtlCol="0" anchor="ctr"/>
           <a:lstStyle/>
           <a:p>
-            <a:pPr indent="0" marL="0">
+            <a:pPr marL="0" indent="0">
               <a:buNone/>
             </a:pPr>
             <a:r>
@@ -5019,7 +4744,7 @@
           <a:bodyPr wrap="square" lIns="0" tIns="0" rIns="0" bIns="0" rtlCol="0" anchor="ctr"/>
           <a:lstStyle/>
           <a:p>
-            <a:pPr indent="0" marL="0">
+            <a:pPr marL="0" indent="0">
               <a:buNone/>
             </a:pPr>
             <a:r>
@@ -5083,7 +4808,7 @@
           <a:bodyPr wrap="square" lIns="0" tIns="0" rIns="0" bIns="0" rtlCol="0" anchor="ctr"/>
           <a:lstStyle/>
           <a:p>
-            <a:pPr indent="0" marL="0">
+            <a:pPr marL="0" indent="0">
               <a:buNone/>
             </a:pPr>
             <a:r>
@@ -5147,7 +4872,7 @@
           <a:bodyPr wrap="square" lIns="0" tIns="0" rIns="0" bIns="0" rtlCol="0" anchor="ctr"/>
           <a:lstStyle/>
           <a:p>
-            <a:pPr indent="0" marL="0">
+            <a:pPr marL="0" indent="0">
               <a:buNone/>
             </a:pPr>
             <a:r>
@@ -5211,7 +4936,7 @@
           <a:bodyPr wrap="square" lIns="0" tIns="0" rIns="0" bIns="0" rtlCol="0" anchor="ctr"/>
           <a:lstStyle/>
           <a:p>
-            <a:pPr indent="0" marL="0">
+            <a:pPr marL="0" indent="0">
               <a:buNone/>
             </a:pPr>
             <a:r>
@@ -5275,7 +5000,7 @@
           <a:bodyPr wrap="square" lIns="0" tIns="0" rIns="0" bIns="0" rtlCol="0" anchor="ctr"/>
           <a:lstStyle/>
           <a:p>
-            <a:pPr indent="0" marL="0">
+            <a:pPr marL="0" indent="0">
               <a:buNone/>
             </a:pPr>
             <a:r>
@@ -5339,7 +5064,7 @@
           <a:bodyPr wrap="square" lIns="0" tIns="0" rIns="0" bIns="0" rtlCol="0" anchor="ctr"/>
           <a:lstStyle/>
           <a:p>
-            <a:pPr indent="0" marL="0">
+            <a:pPr marL="0" indent="0">
               <a:buNone/>
             </a:pPr>
             <a:r>
@@ -5403,7 +5128,7 @@
           <a:bodyPr wrap="square" lIns="0" tIns="0" rIns="0" bIns="0" rtlCol="0" anchor="ctr"/>
           <a:lstStyle/>
           <a:p>
-            <a:pPr indent="0" marL="0">
+            <a:pPr marL="0" indent="0">
               <a:buNone/>
             </a:pPr>
             <a:r>
@@ -5467,7 +5192,7 @@
           <a:bodyPr wrap="square" lIns="0" tIns="0" rIns="0" bIns="0" rtlCol="0" anchor="ctr"/>
           <a:lstStyle/>
           <a:p>
-            <a:pPr indent="0" marL="0">
+            <a:pPr marL="0" indent="0">
               <a:buNone/>
             </a:pPr>
             <a:r>
@@ -5531,7 +5256,7 @@
           <a:bodyPr wrap="square" lIns="0" tIns="0" rIns="0" bIns="0" rtlCol="0" anchor="ctr"/>
           <a:lstStyle/>
           <a:p>
-            <a:pPr indent="0" marL="0">
+            <a:pPr marL="0" indent="0">
               <a:buNone/>
             </a:pPr>
             <a:r>
@@ -5595,7 +5320,7 @@
           <a:bodyPr wrap="square" lIns="0" tIns="0" rIns="0" bIns="0" rtlCol="0" anchor="ctr"/>
           <a:lstStyle/>
           <a:p>
-            <a:pPr indent="0" marL="0">
+            <a:pPr marL="0" indent="0">
               <a:buNone/>
             </a:pPr>
             <a:r>
@@ -5659,7 +5384,7 @@
           <a:bodyPr wrap="square" lIns="0" tIns="0" rIns="0" bIns="0" rtlCol="0" anchor="ctr"/>
           <a:lstStyle/>
           <a:p>
-            <a:pPr indent="0" marL="0">
+            <a:pPr marL="0" indent="0">
               <a:buNone/>
             </a:pPr>
             <a:r>
@@ -5723,7 +5448,7 @@
           <a:bodyPr wrap="square" lIns="0" tIns="0" rIns="0" bIns="0" rtlCol="0" anchor="ctr"/>
           <a:lstStyle/>
           <a:p>
-            <a:pPr indent="0" marL="0">
+            <a:pPr marL="0" indent="0">
               <a:buNone/>
             </a:pPr>
             <a:r>
@@ -5787,7 +5512,7 @@
           <a:bodyPr wrap="square" lIns="0" tIns="0" rIns="0" bIns="0" rtlCol="0" anchor="ctr"/>
           <a:lstStyle/>
           <a:p>
-            <a:pPr indent="0" marL="0">
+            <a:pPr marL="0" indent="0">
               <a:buNone/>
             </a:pPr>
             <a:r>
@@ -5851,7 +5576,7 @@
           <a:bodyPr wrap="square" lIns="0" tIns="0" rIns="0" bIns="0" rtlCol="0" anchor="ctr"/>
           <a:lstStyle/>
           <a:p>
-            <a:pPr indent="0" marL="0">
+            <a:pPr marL="0" indent="0">
               <a:buNone/>
             </a:pPr>
             <a:r>
@@ -5915,7 +5640,7 @@
           <a:bodyPr wrap="square" lIns="0" tIns="0" rIns="0" bIns="0" rtlCol="0" anchor="ctr"/>
           <a:lstStyle/>
           <a:p>
-            <a:pPr indent="0" marL="0">
+            <a:pPr marL="0" indent="0">
               <a:buNone/>
             </a:pPr>
             <a:r>
@@ -5979,7 +5704,7 @@
           <a:bodyPr wrap="square" lIns="0" tIns="0" rIns="0" bIns="0" rtlCol="0" anchor="ctr"/>
           <a:lstStyle/>
           <a:p>
-            <a:pPr indent="0" marL="0">
+            <a:pPr marL="0" indent="0">
               <a:buNone/>
             </a:pPr>
             <a:r>
@@ -6043,7 +5768,7 @@
           <a:bodyPr wrap="square" lIns="0" tIns="0" rIns="0" bIns="0" rtlCol="0" anchor="ctr"/>
           <a:lstStyle/>
           <a:p>
-            <a:pPr indent="0" marL="0">
+            <a:pPr marL="0" indent="0">
               <a:buNone/>
             </a:pPr>
             <a:r>
@@ -6107,7 +5832,7 @@
           <a:bodyPr wrap="square" lIns="0" tIns="0" rIns="0" bIns="0" rtlCol="0" anchor="ctr"/>
           <a:lstStyle/>
           <a:p>
-            <a:pPr indent="0" marL="0">
+            <a:pPr marL="0" indent="0">
               <a:buNone/>
             </a:pPr>
             <a:r>
@@ -6171,7 +5896,7 @@
           <a:bodyPr wrap="square" lIns="0" tIns="0" rIns="0" bIns="0" rtlCol="0" anchor="ctr"/>
           <a:lstStyle/>
           <a:p>
-            <a:pPr indent="0" marL="0">
+            <a:pPr marL="0" indent="0">
               <a:buNone/>
             </a:pPr>
             <a:r>
@@ -6235,7 +5960,7 @@
           <a:bodyPr wrap="square" lIns="0" tIns="0" rIns="0" bIns="0" rtlCol="0" anchor="ctr"/>
           <a:lstStyle/>
           <a:p>
-            <a:pPr indent="0" marL="0">
+            <a:pPr marL="0" indent="0">
               <a:buNone/>
             </a:pPr>
             <a:r>
@@ -6299,7 +6024,7 @@
           <a:bodyPr wrap="square" lIns="0" tIns="0" rIns="0" bIns="0" rtlCol="0" anchor="ctr"/>
           <a:lstStyle/>
           <a:p>
-            <a:pPr indent="0" marL="0">
+            <a:pPr marL="0" indent="0">
               <a:buNone/>
             </a:pPr>
             <a:r>
@@ -6363,7 +6088,7 @@
           <a:bodyPr wrap="square" lIns="0" tIns="0" rIns="0" bIns="0" rtlCol="0" anchor="ctr"/>
           <a:lstStyle/>
           <a:p>
-            <a:pPr indent="0" marL="0">
+            <a:pPr marL="0" indent="0">
               <a:buNone/>
             </a:pPr>
             <a:r>
@@ -6427,7 +6152,7 @@
           <a:bodyPr wrap="square" lIns="0" tIns="0" rIns="0" bIns="0" rtlCol="0" anchor="ctr"/>
           <a:lstStyle/>
           <a:p>
-            <a:pPr indent="0" marL="0">
+            <a:pPr marL="0" indent="0">
               <a:buNone/>
             </a:pPr>
             <a:r>
@@ -6491,7 +6216,7 @@
           <a:bodyPr wrap="square" lIns="0" tIns="0" rIns="0" bIns="0" rtlCol="0" anchor="ctr"/>
           <a:lstStyle/>
           <a:p>
-            <a:pPr indent="0" marL="0">
+            <a:pPr marL="0" indent="0">
               <a:buNone/>
             </a:pPr>
             <a:r>
@@ -6555,7 +6280,7 @@
           <a:bodyPr wrap="square" lIns="0" tIns="0" rIns="0" bIns="0" rtlCol="0" anchor="ctr"/>
           <a:lstStyle/>
           <a:p>
-            <a:pPr indent="0" marL="0">
+            <a:pPr marL="0" indent="0">
               <a:buNone/>
             </a:pPr>
             <a:r>
@@ -6614,6 +6339,7 @@
         <a:solidFill>
           <a:srgbClr val="E8F4F8"/>
         </a:solidFill>
+        <a:effectLst/>
       </p:bgPr>
     </p:bg>
     <p:spTree>
@@ -6701,7 +6427,7 @@
           <a:bodyPr wrap="square" lIns="0" tIns="0" rIns="0" bIns="0" rtlCol="0" anchor="ctr"/>
           <a:lstStyle/>
           <a:p>
-            <a:pPr indent="0" marL="0">
+            <a:pPr marL="0" indent="0">
               <a:buNone/>
             </a:pPr>
             <a:r>
@@ -6740,7 +6466,7 @@
           <a:bodyPr wrap="square" lIns="0" tIns="0" rIns="0" bIns="0" rtlCol="0" anchor="ctr"/>
           <a:lstStyle/>
           <a:p>
-            <a:pPr indent="0" marL="0">
+            <a:pPr marL="0" indent="0">
               <a:buNone/>
             </a:pPr>
             <a:r>
@@ -6782,7 +6508,7 @@
             <a:prstDash val="solid"/>
           </a:ln>
           <a:effectLst>
-            <a:outerShdw sx="100000" sy="100000" kx="0" ky="0" algn="bl" rotWithShape="0" blurRad="63500" dist="25400" dir="8100000">
+            <a:outerShdw blurRad="63500" dist="25400" dir="8100000" algn="bl" rotWithShape="0">
               <a:srgbClr val="000000">
                 <a:alpha val="10000"/>
               </a:srgbClr>
@@ -6861,7 +6587,7 @@
           <a:bodyPr wrap="square" lIns="0" tIns="0" rIns="0" bIns="0" rtlCol="0" anchor="ctr"/>
           <a:lstStyle/>
           <a:p>
-            <a:pPr indent="0" marL="0">
+            <a:pPr marL="0" indent="0">
               <a:buNone/>
             </a:pPr>
             <a:r>
@@ -6900,7 +6626,7 @@
           <a:bodyPr wrap="square" lIns="0" tIns="0" rIns="0" bIns="0" rtlCol="0" anchor="ctr"/>
           <a:lstStyle/>
           <a:p>
-            <a:pPr indent="0" marL="0">
+            <a:pPr marL="0" indent="0">
               <a:buNone/>
             </a:pPr>
             <a:r>
@@ -6939,7 +6665,7 @@
           <a:bodyPr wrap="square" lIns="0" tIns="0" rIns="0" bIns="0" rtlCol="0" anchor="ctr"/>
           <a:lstStyle/>
           <a:p>
-            <a:pPr indent="0" marL="0">
+            <a:pPr marL="0" indent="0">
               <a:buNone/>
             </a:pPr>
             <a:r>
@@ -6956,7 +6682,7 @@
             <a:endParaRPr lang="en-US" sz="1200" dirty="0"/>
           </a:p>
           <a:p>
-            <a:pPr indent="0" marL="0">
+            <a:pPr marL="0" indent="0">
               <a:buNone/>
             </a:pPr>
             <a:r>
@@ -6995,7 +6721,7 @@
           <a:bodyPr wrap="square" lIns="0" tIns="0" rIns="0" bIns="0" rtlCol="0" anchor="ctr"/>
           <a:lstStyle/>
           <a:p>
-            <a:pPr indent="0" marL="0">
+            <a:pPr marL="0" indent="0">
               <a:buNone/>
             </a:pPr>
             <a:r>
@@ -7012,7 +6738,7 @@
             <a:endParaRPr lang="en-US" sz="1150" dirty="0"/>
           </a:p>
           <a:p>
-            <a:pPr indent="0" marL="0">
+            <a:pPr marL="0" indent="0">
               <a:buNone/>
             </a:pPr>
             <a:r>
@@ -7076,7 +6802,7 @@
           <a:bodyPr wrap="square" lIns="76200" tIns="76200" rIns="76200" bIns="76200" rtlCol="0" anchor="ctr"/>
           <a:lstStyle/>
           <a:p>
-            <a:pPr indent="0" marL="0">
+            <a:pPr marL="0" indent="0">
               <a:buNone/>
             </a:pPr>
             <a:r>
@@ -7115,7 +6841,7 @@
           <a:bodyPr wrap="square" lIns="0" tIns="0" rIns="0" bIns="0" rtlCol="0" anchor="ctr"/>
           <a:lstStyle/>
           <a:p>
-            <a:pPr indent="0" marL="0">
+            <a:pPr marL="0" indent="0">
               <a:buNone/>
             </a:pPr>
             <a:r>
@@ -7132,7 +6858,7 @@
             <a:endParaRPr lang="en-US" sz="1100" dirty="0"/>
           </a:p>
           <a:p>
-            <a:pPr indent="0" marL="0">
+            <a:pPr marL="0" indent="0">
               <a:buNone/>
             </a:pPr>
             <a:r>
@@ -7199,7 +6925,7 @@
             <a:prstDash val="solid"/>
           </a:ln>
           <a:effectLst>
-            <a:outerShdw sx="100000" sy="100000" kx="0" ky="0" algn="bl" rotWithShape="0" blurRad="63500" dist="25400" dir="8100000">
+            <a:outerShdw blurRad="63500" dist="25400" dir="8100000" algn="bl" rotWithShape="0">
               <a:srgbClr val="000000">
                 <a:alpha val="10000"/>
               </a:srgbClr>
@@ -7278,7 +7004,7 @@
           <a:bodyPr wrap="square" lIns="0" tIns="0" rIns="0" bIns="0" rtlCol="0" anchor="ctr"/>
           <a:lstStyle/>
           <a:p>
-            <a:pPr indent="0" marL="0">
+            <a:pPr marL="0" indent="0">
               <a:buNone/>
             </a:pPr>
             <a:r>
@@ -7317,7 +7043,7 @@
           <a:bodyPr wrap="square" lIns="0" tIns="0" rIns="0" bIns="0" rtlCol="0" anchor="ctr"/>
           <a:lstStyle/>
           <a:p>
-            <a:pPr indent="0" marL="0">
+            <a:pPr marL="0" indent="0">
               <a:buNone/>
             </a:pPr>
             <a:r>
@@ -7356,7 +7082,7 @@
           <a:bodyPr wrap="square" lIns="0" tIns="0" rIns="0" bIns="0" rtlCol="0" anchor="ctr"/>
           <a:lstStyle/>
           <a:p>
-            <a:pPr indent="0" marL="0">
+            <a:pPr marL="0" indent="0">
               <a:buNone/>
             </a:pPr>
             <a:r>
@@ -7373,7 +7099,7 @@
             <a:endParaRPr lang="en-US" sz="1200" dirty="0"/>
           </a:p>
           <a:p>
-            <a:pPr indent="0" marL="0">
+            <a:pPr marL="0" indent="0">
               <a:buNone/>
             </a:pPr>
             <a:r>
@@ -7412,7 +7138,7 @@
           <a:bodyPr wrap="square" lIns="0" tIns="0" rIns="0" bIns="0" rtlCol="0" anchor="ctr"/>
           <a:lstStyle/>
           <a:p>
-            <a:pPr indent="0" marL="0">
+            <a:pPr marL="0" indent="0">
               <a:buNone/>
             </a:pPr>
             <a:r>
@@ -7429,7 +7155,7 @@
             <a:endParaRPr lang="en-US" sz="1150" dirty="0"/>
           </a:p>
           <a:p>
-            <a:pPr indent="0" marL="0">
+            <a:pPr marL="0" indent="0">
               <a:buNone/>
             </a:pPr>
             <a:r>
@@ -7493,7 +7219,7 @@
           <a:bodyPr wrap="square" lIns="76200" tIns="76200" rIns="76200" bIns="76200" rtlCol="0" anchor="ctr"/>
           <a:lstStyle/>
           <a:p>
-            <a:pPr indent="0" marL="0">
+            <a:pPr marL="0" indent="0">
               <a:buNone/>
             </a:pPr>
             <a:r>
@@ -7532,7 +7258,7 @@
           <a:bodyPr wrap="square" lIns="0" tIns="0" rIns="0" bIns="0" rtlCol="0" anchor="ctr"/>
           <a:lstStyle/>
           <a:p>
-            <a:pPr indent="0" marL="0">
+            <a:pPr marL="0" indent="0">
               <a:buNone/>
             </a:pPr>
             <a:r>
@@ -7549,7 +7275,7 @@
             <a:endParaRPr lang="en-US" sz="1100" dirty="0"/>
           </a:p>
           <a:p>
-            <a:pPr indent="0" marL="0">
+            <a:pPr marL="0" indent="0">
               <a:buNone/>
             </a:pPr>
             <a:r>
@@ -7583,6 +7309,7 @@
         <a:solidFill>
           <a:srgbClr val="E8F4F8"/>
         </a:solidFill>
+        <a:effectLst/>
       </p:bgPr>
     </p:bg>
     <p:spTree>
@@ -7670,7 +7397,7 @@
           <a:bodyPr wrap="square" lIns="0" tIns="0" rIns="0" bIns="0" rtlCol="0" anchor="ctr"/>
           <a:lstStyle/>
           <a:p>
-            <a:pPr indent="0" marL="0">
+            <a:pPr marL="0" indent="0">
               <a:buNone/>
             </a:pPr>
             <a:r>
@@ -7709,7 +7436,7 @@
           <a:bodyPr wrap="square" lIns="0" tIns="0" rIns="0" bIns="0" rtlCol="0" anchor="ctr"/>
           <a:lstStyle/>
           <a:p>
-            <a:pPr indent="0" marL="0">
+            <a:pPr marL="0" indent="0">
               <a:buNone/>
             </a:pPr>
             <a:r>
@@ -7751,7 +7478,7 @@
             <a:prstDash val="solid"/>
           </a:ln>
           <a:effectLst>
-            <a:outerShdw sx="100000" sy="100000" kx="0" ky="0" algn="bl" rotWithShape="0" blurRad="63500" dist="25400" dir="8100000">
+            <a:outerShdw blurRad="63500" dist="25400" dir="8100000" algn="bl" rotWithShape="0">
               <a:srgbClr val="000000">
                 <a:alpha val="10000"/>
               </a:srgbClr>
@@ -7805,7 +7532,7 @@
           <a:bodyPr wrap="square" lIns="0" tIns="0" rIns="0" bIns="0" rtlCol="0" anchor="ctr"/>
           <a:lstStyle/>
           <a:p>
-            <a:pPr indent="0" marL="0">
+            <a:pPr marL="0" indent="0">
               <a:buNone/>
             </a:pPr>
             <a:r>
@@ -7844,7 +7571,7 @@
           <a:bodyPr wrap="square" lIns="0" tIns="0" rIns="0" bIns="0" rtlCol="0" anchor="ctr"/>
           <a:lstStyle/>
           <a:p>
-            <a:pPr indent="0" marL="0">
+            <a:pPr marL="0" indent="0">
               <a:buNone/>
             </a:pPr>
             <a:r>
@@ -7883,7 +7610,7 @@
           <a:bodyPr wrap="square" lIns="0" tIns="0" rIns="0" bIns="0" rtlCol="0" anchor="ctr"/>
           <a:lstStyle/>
           <a:p>
-            <a:pPr indent="0" marL="0">
+            <a:pPr marL="0" indent="0">
               <a:buNone/>
             </a:pPr>
             <a:r>
@@ -7922,7 +7649,7 @@
           <a:bodyPr wrap="square" lIns="0" tIns="0" rIns="0" bIns="0" rtlCol="0" anchor="ctr"/>
           <a:lstStyle/>
           <a:p>
-            <a:pPr indent="0" marL="0">
+            <a:pPr marL="0" indent="0">
               <a:buNone/>
             </a:pPr>
             <a:r>
@@ -7964,7 +7691,7 @@
             <a:prstDash val="solid"/>
           </a:ln>
           <a:effectLst>
-            <a:outerShdw sx="100000" sy="100000" kx="0" ky="0" algn="bl" rotWithShape="0" blurRad="63500" dist="25400" dir="8100000">
+            <a:outerShdw blurRad="63500" dist="25400" dir="8100000" algn="bl" rotWithShape="0">
               <a:srgbClr val="000000">
                 <a:alpha val="10000"/>
               </a:srgbClr>
@@ -8018,7 +7745,7 @@
           <a:bodyPr wrap="square" lIns="0" tIns="0" rIns="0" bIns="0" rtlCol="0" anchor="ctr"/>
           <a:lstStyle/>
           <a:p>
-            <a:pPr indent="0" marL="0">
+            <a:pPr marL="0" indent="0">
               <a:buNone/>
             </a:pPr>
             <a:r>
@@ -8057,7 +7784,7 @@
           <a:bodyPr wrap="square" lIns="0" tIns="0" rIns="0" bIns="0" rtlCol="0" anchor="ctr"/>
           <a:lstStyle/>
           <a:p>
-            <a:pPr indent="0" marL="0">
+            <a:pPr marL="0" indent="0">
               <a:buNone/>
             </a:pPr>
             <a:r>
@@ -8096,7 +7823,7 @@
           <a:bodyPr wrap="square" lIns="0" tIns="0" rIns="0" bIns="0" rtlCol="0" anchor="ctr"/>
           <a:lstStyle/>
           <a:p>
-            <a:pPr indent="0" marL="0">
+            <a:pPr marL="0" indent="0">
               <a:buNone/>
             </a:pPr>
             <a:r>
@@ -8135,7 +7862,7 @@
           <a:bodyPr wrap="square" lIns="0" tIns="0" rIns="0" bIns="0" rtlCol="0" anchor="ctr"/>
           <a:lstStyle/>
           <a:p>
-            <a:pPr indent="0" marL="0">
+            <a:pPr marL="0" indent="0">
               <a:buNone/>
             </a:pPr>
             <a:r>
@@ -8174,7 +7901,7 @@
           <a:bodyPr wrap="square" lIns="0" tIns="0" rIns="0" bIns="0" rtlCol="0" anchor="ctr"/>
           <a:lstStyle/>
           <a:p>
-            <a:pPr indent="0" marL="0">
+            <a:pPr marL="0" indent="0">
               <a:buNone/>
             </a:pPr>
             <a:r>
@@ -8213,7 +7940,7 @@
           <a:bodyPr wrap="square" lIns="0" tIns="0" rIns="0" bIns="0" rtlCol="0" anchor="ctr"/>
           <a:lstStyle/>
           <a:p>
-            <a:pPr indent="0" marL="0">
+            <a:pPr marL="0" indent="0">
               <a:buNone/>
             </a:pPr>
             <a:r>
@@ -8252,7 +7979,7 @@
           <a:bodyPr wrap="square" lIns="0" tIns="0" rIns="0" bIns="0" rtlCol="0" anchor="ctr"/>
           <a:lstStyle/>
           <a:p>
-            <a:pPr indent="0" marL="0">
+            <a:pPr marL="0" indent="0">
               <a:buNone/>
             </a:pPr>
             <a:r>
@@ -8294,7 +8021,7 @@
             <a:prstDash val="solid"/>
           </a:ln>
           <a:effectLst>
-            <a:outerShdw sx="100000" sy="100000" kx="0" ky="0" algn="bl" rotWithShape="0" blurRad="63500" dist="25400" dir="8100000">
+            <a:outerShdw blurRad="63500" dist="25400" dir="8100000" algn="bl" rotWithShape="0">
               <a:srgbClr val="000000">
                 <a:alpha val="10000"/>
               </a:srgbClr>
@@ -8348,7 +8075,7 @@
           <a:bodyPr wrap="square" lIns="0" tIns="0" rIns="0" bIns="0" rtlCol="0" anchor="ctr"/>
           <a:lstStyle/>
           <a:p>
-            <a:pPr indent="0" marL="0">
+            <a:pPr marL="0" indent="0">
               <a:buNone/>
             </a:pPr>
             <a:r>
@@ -8387,7 +8114,7 @@
           <a:bodyPr wrap="square" lIns="0" tIns="0" rIns="0" bIns="0" rtlCol="0" anchor="ctr"/>
           <a:lstStyle/>
           <a:p>
-            <a:pPr indent="0" marL="0">
+            <a:pPr marL="0" indent="0">
               <a:buNone/>
             </a:pPr>
             <a:r>
@@ -8426,7 +8153,7 @@
           <a:bodyPr wrap="square" lIns="0" tIns="0" rIns="0" bIns="0" rtlCol="0" anchor="ctr"/>
           <a:lstStyle/>
           <a:p>
-            <a:pPr indent="0" marL="0">
+            <a:pPr marL="0" indent="0">
               <a:buNone/>
             </a:pPr>
             <a:r>
@@ -8465,7 +8192,7 @@
           <a:bodyPr wrap="square" lIns="0" tIns="0" rIns="0" bIns="0" rtlCol="0" anchor="ctr"/>
           <a:lstStyle/>
           <a:p>
-            <a:pPr indent="0" marL="0">
+            <a:pPr marL="0" indent="0">
               <a:buNone/>
             </a:pPr>
             <a:r>
@@ -8504,7 +8231,7 @@
           <a:bodyPr wrap="square" lIns="0" tIns="0" rIns="0" bIns="0" rtlCol="0" anchor="ctr"/>
           <a:lstStyle/>
           <a:p>
-            <a:pPr indent="0" marL="0">
+            <a:pPr marL="0" indent="0">
               <a:buNone/>
             </a:pPr>
             <a:r>
@@ -8543,7 +8270,7 @@
           <a:bodyPr wrap="square" lIns="0" tIns="0" rIns="0" bIns="0" rtlCol="0" anchor="ctr"/>
           <a:lstStyle/>
           <a:p>
-            <a:pPr indent="0" marL="0">
+            <a:pPr marL="0" indent="0">
               <a:buNone/>
             </a:pPr>
             <a:r>
@@ -8582,7 +8309,7 @@
           <a:bodyPr wrap="square" lIns="0" tIns="0" rIns="0" bIns="0" rtlCol="0" anchor="ctr"/>
           <a:lstStyle/>
           <a:p>
-            <a:pPr indent="0" marL="0">
+            <a:pPr marL="0" indent="0">
               <a:buNone/>
             </a:pPr>
             <a:r>
@@ -8624,7 +8351,7 @@
             <a:prstDash val="solid"/>
           </a:ln>
           <a:effectLst>
-            <a:outerShdw sx="100000" sy="100000" kx="0" ky="0" algn="bl" rotWithShape="0" blurRad="63500" dist="25400" dir="8100000">
+            <a:outerShdw blurRad="63500" dist="25400" dir="8100000" algn="bl" rotWithShape="0">
               <a:srgbClr val="000000">
                 <a:alpha val="10000"/>
               </a:srgbClr>
@@ -8678,7 +8405,7 @@
           <a:bodyPr wrap="square" lIns="0" tIns="0" rIns="0" bIns="0" rtlCol="0" anchor="ctr"/>
           <a:lstStyle/>
           <a:p>
-            <a:pPr indent="0" marL="0">
+            <a:pPr marL="0" indent="0">
               <a:buNone/>
             </a:pPr>
             <a:r>
@@ -8742,7 +8469,7 @@
           <a:bodyPr wrap="square" lIns="0" tIns="0" rIns="0" bIns="0" rtlCol="0" anchor="ctr"/>
           <a:lstStyle/>
           <a:p>
-            <a:pPr indent="0" marL="0">
+            <a:pPr marL="0" indent="0">
               <a:buNone/>
             </a:pPr>
             <a:r>
@@ -8806,7 +8533,7 @@
           <a:bodyPr wrap="square" lIns="0" tIns="0" rIns="0" bIns="0" rtlCol="0" anchor="ctr"/>
           <a:lstStyle/>
           <a:p>
-            <a:pPr indent="0" marL="0">
+            <a:pPr marL="0" indent="0">
               <a:buNone/>
             </a:pPr>
             <a:r>
@@ -8870,7 +8597,7 @@
           <a:bodyPr wrap="square" lIns="0" tIns="0" rIns="0" bIns="0" rtlCol="0" anchor="ctr"/>
           <a:lstStyle/>
           <a:p>
-            <a:pPr indent="0" marL="0">
+            <a:pPr marL="0" indent="0">
               <a:buNone/>
             </a:pPr>
             <a:r>
@@ -8934,7 +8661,7 @@
           <a:bodyPr wrap="square" lIns="0" tIns="0" rIns="0" bIns="0" rtlCol="0" anchor="ctr"/>
           <a:lstStyle/>
           <a:p>
-            <a:pPr indent="0" marL="0">
+            <a:pPr marL="0" indent="0">
               <a:buNone/>
             </a:pPr>
             <a:r>
@@ -8998,7 +8725,7 @@
           <a:bodyPr wrap="square" lIns="0" tIns="0" rIns="0" bIns="0" rtlCol="0" anchor="ctr"/>
           <a:lstStyle/>
           <a:p>
-            <a:pPr indent="0" marL="0">
+            <a:pPr marL="0" indent="0">
               <a:buNone/>
             </a:pPr>
             <a:r>
@@ -9062,7 +8789,7 @@
           <a:bodyPr wrap="square" lIns="0" tIns="0" rIns="0" bIns="0" rtlCol="0" anchor="ctr"/>
           <a:lstStyle/>
           <a:p>
-            <a:pPr indent="0" marL="0">
+            <a:pPr marL="0" indent="0">
               <a:buNone/>
             </a:pPr>
             <a:r>
@@ -9126,7 +8853,7 @@
           <a:bodyPr wrap="square" lIns="0" tIns="0" rIns="0" bIns="0" rtlCol="0" anchor="ctr"/>
           <a:lstStyle/>
           <a:p>
-            <a:pPr indent="0" marL="0">
+            <a:pPr marL="0" indent="0">
               <a:buNone/>
             </a:pPr>
             <a:r>
@@ -9190,7 +8917,7 @@
           <a:bodyPr wrap="square" lIns="0" tIns="0" rIns="0" bIns="0" rtlCol="0" anchor="ctr"/>
           <a:lstStyle/>
           <a:p>
-            <a:pPr indent="0" marL="0">
+            <a:pPr marL="0" indent="0">
               <a:buNone/>
             </a:pPr>
             <a:r>
@@ -9254,7 +8981,7 @@
           <a:bodyPr wrap="square" lIns="0" tIns="0" rIns="0" bIns="0" rtlCol="0" anchor="ctr"/>
           <a:lstStyle/>
           <a:p>
-            <a:pPr indent="0" marL="0">
+            <a:pPr marL="0" indent="0">
               <a:buNone/>
             </a:pPr>
             <a:r>
@@ -9318,7 +9045,7 @@
           <a:bodyPr wrap="square" lIns="0" tIns="0" rIns="0" bIns="0" rtlCol="0" anchor="ctr"/>
           <a:lstStyle/>
           <a:p>
-            <a:pPr indent="0" marL="0">
+            <a:pPr marL="0" indent="0">
               <a:buNone/>
             </a:pPr>
             <a:r>
@@ -9382,7 +9109,7 @@
           <a:bodyPr wrap="square" lIns="0" tIns="0" rIns="0" bIns="0" rtlCol="0" anchor="ctr"/>
           <a:lstStyle/>
           <a:p>
-            <a:pPr indent="0" marL="0">
+            <a:pPr marL="0" indent="0">
               <a:buNone/>
             </a:pPr>
             <a:r>
@@ -9446,7 +9173,7 @@
           <a:bodyPr wrap="square" lIns="0" tIns="0" rIns="0" bIns="0" rtlCol="0" anchor="ctr"/>
           <a:lstStyle/>
           <a:p>
-            <a:pPr indent="0" marL="0">
+            <a:pPr marL="0" indent="0">
               <a:buNone/>
             </a:pPr>
             <a:r>
@@ -9480,6 +9207,7 @@
         <a:solidFill>
           <a:srgbClr val="0D1B2A"/>
         </a:solidFill>
+        <a:effectLst/>
       </p:bgPr>
     </p:bg>
     <p:spTree>
@@ -9567,7 +9295,7 @@
           <a:bodyPr wrap="square" lIns="0" tIns="0" rIns="0" bIns="0" rtlCol="0" anchor="ctr"/>
           <a:lstStyle/>
           <a:p>
-            <a:pPr indent="0" marL="0">
+            <a:pPr marL="0" indent="0">
               <a:buNone/>
             </a:pPr>
             <a:r>
@@ -9631,7 +9359,7 @@
           <a:bodyPr wrap="square" lIns="0" tIns="0" rIns="0" bIns="0" rtlCol="0" anchor="ctr"/>
           <a:lstStyle/>
           <a:p>
-            <a:pPr indent="0" marL="0">
+            <a:pPr marL="0" indent="0">
               <a:buNone/>
             </a:pPr>
             <a:r>
@@ -9673,7 +9401,7 @@
             <a:prstDash val="solid"/>
           </a:ln>
           <a:effectLst>
-            <a:outerShdw sx="100000" sy="100000" kx="0" ky="0" algn="bl" rotWithShape="0" blurRad="63500" dist="25400" dir="8100000">
+            <a:outerShdw blurRad="63500" dist="25400" dir="8100000" algn="bl" rotWithShape="0">
               <a:srgbClr val="000000">
                 <a:alpha val="10000"/>
               </a:srgbClr>
@@ -9752,7 +9480,7 @@
           <a:bodyPr wrap="square" lIns="0" tIns="0" rIns="0" bIns="0" rtlCol="0" anchor="ctr"/>
           <a:lstStyle/>
           <a:p>
-            <a:pPr indent="0" marL="0">
+            <a:pPr marL="0" indent="0">
               <a:buNone/>
             </a:pPr>
             <a:r>
@@ -9791,7 +9519,7 @@
           <a:bodyPr wrap="square" lIns="0" tIns="0" rIns="0" bIns="0" rtlCol="0" anchor="ctr"/>
           <a:lstStyle/>
           <a:p>
-            <a:pPr indent="0" marL="0">
+            <a:pPr marL="0" indent="0">
               <a:buNone/>
             </a:pPr>
             <a:r>
@@ -9830,7 +9558,7 @@
           <a:bodyPr wrap="square" lIns="0" tIns="0" rIns="0" bIns="0" rtlCol="0" anchor="ctr"/>
           <a:lstStyle/>
           <a:p>
-            <a:pPr indent="0" marL="0">
+            <a:pPr marL="0" indent="0">
               <a:buNone/>
             </a:pPr>
             <a:r>
@@ -9869,7 +9597,7 @@
           <a:bodyPr wrap="square" lIns="0" tIns="0" rIns="0" bIns="0" rtlCol="0" anchor="ctr"/>
           <a:lstStyle/>
           <a:p>
-            <a:pPr indent="0" marL="0">
+            <a:pPr marL="0" indent="0">
               <a:buNone/>
             </a:pPr>
             <a:r>
@@ -9908,7 +9636,7 @@
           <a:bodyPr wrap="square" lIns="0" tIns="0" rIns="0" bIns="0" rtlCol="0" anchor="ctr"/>
           <a:lstStyle/>
           <a:p>
-            <a:pPr indent="0" marL="0">
+            <a:pPr marL="0" indent="0">
               <a:buNone/>
             </a:pPr>
             <a:r>
@@ -9947,7 +9675,7 @@
           <a:bodyPr wrap="square" lIns="0" tIns="0" rIns="0" bIns="0" rtlCol="0" anchor="ctr"/>
           <a:lstStyle/>
           <a:p>
-            <a:pPr indent="0" marL="0">
+            <a:pPr marL="0" indent="0">
               <a:buNone/>
             </a:pPr>
             <a:endParaRPr lang="en-US" sz="1200" dirty="0"/>
@@ -9975,7 +9703,7 @@
           <a:bodyPr wrap="square" lIns="0" tIns="0" rIns="0" bIns="0" rtlCol="0" anchor="ctr"/>
           <a:lstStyle/>
           <a:p>
-            <a:pPr indent="0" marL="0">
+            <a:pPr marL="0" indent="0">
               <a:buNone/>
             </a:pPr>
             <a:r>
@@ -10014,7 +9742,7 @@
           <a:bodyPr wrap="square" lIns="0" tIns="0" rIns="0" bIns="0" rtlCol="0" anchor="ctr"/>
           <a:lstStyle/>
           <a:p>
-            <a:pPr indent="0" marL="0">
+            <a:pPr marL="0" indent="0">
               <a:buNone/>
             </a:pPr>
             <a:r>
@@ -10056,7 +9784,7 @@
             <a:prstDash val="solid"/>
           </a:ln>
           <a:effectLst>
-            <a:outerShdw sx="100000" sy="100000" kx="0" ky="0" algn="bl" rotWithShape="0" blurRad="63500" dist="25400" dir="8100000">
+            <a:outerShdw blurRad="63500" dist="25400" dir="8100000" algn="bl" rotWithShape="0">
               <a:srgbClr val="000000">
                 <a:alpha val="10000"/>
               </a:srgbClr>
@@ -10135,7 +9863,7 @@
           <a:bodyPr wrap="square" lIns="0" tIns="0" rIns="0" bIns="0" rtlCol="0" anchor="ctr"/>
           <a:lstStyle/>
           <a:p>
-            <a:pPr indent="0" marL="0">
+            <a:pPr marL="0" indent="0">
               <a:buNone/>
             </a:pPr>
             <a:r>
@@ -10174,7 +9902,7 @@
           <a:bodyPr wrap="square" lIns="0" tIns="0" rIns="0" bIns="0" rtlCol="0" anchor="ctr"/>
           <a:lstStyle/>
           <a:p>
-            <a:pPr indent="0" marL="0">
+            <a:pPr marL="0" indent="0">
               <a:buNone/>
             </a:pPr>
             <a:r>
@@ -10213,7 +9941,7 @@
           <a:bodyPr wrap="square" lIns="0" tIns="0" rIns="0" bIns="0" rtlCol="0" anchor="ctr"/>
           <a:lstStyle/>
           <a:p>
-            <a:pPr indent="0" marL="0">
+            <a:pPr marL="0" indent="0">
               <a:buNone/>
             </a:pPr>
             <a:r>
@@ -10252,7 +9980,7 @@
           <a:bodyPr wrap="square" lIns="0" tIns="0" rIns="0" bIns="0" rtlCol="0" anchor="ctr"/>
           <a:lstStyle/>
           <a:p>
-            <a:pPr indent="0" marL="0">
+            <a:pPr marL="0" indent="0">
               <a:buNone/>
             </a:pPr>
             <a:r>
@@ -10291,7 +10019,7 @@
           <a:bodyPr wrap="square" lIns="0" tIns="0" rIns="0" bIns="0" rtlCol="0" anchor="ctr"/>
           <a:lstStyle/>
           <a:p>
-            <a:pPr indent="0" marL="0">
+            <a:pPr marL="0" indent="0">
               <a:buNone/>
             </a:pPr>
             <a:r>
@@ -10330,7 +10058,7 @@
           <a:bodyPr wrap="square" lIns="0" tIns="0" rIns="0" bIns="0" rtlCol="0" anchor="ctr"/>
           <a:lstStyle/>
           <a:p>
-            <a:pPr indent="0" marL="0">
+            <a:pPr marL="0" indent="0">
               <a:buNone/>
             </a:pPr>
             <a:endParaRPr lang="en-US" sz="1200" dirty="0"/>
@@ -10358,7 +10086,7 @@
           <a:bodyPr wrap="square" lIns="0" tIns="0" rIns="0" bIns="0" rtlCol="0" anchor="ctr"/>
           <a:lstStyle/>
           <a:p>
-            <a:pPr indent="0" marL="0">
+            <a:pPr marL="0" indent="0">
               <a:buNone/>
             </a:pPr>
             <a:r>
@@ -10397,7 +10125,7 @@
           <a:bodyPr wrap="square" lIns="0" tIns="0" rIns="0" bIns="0" rtlCol="0" anchor="ctr"/>
           <a:lstStyle/>
           <a:p>
-            <a:pPr indent="0" marL="0">
+            <a:pPr marL="0" indent="0">
               <a:buNone/>
             </a:pPr>
             <a:r>
@@ -10436,7 +10164,7 @@
           <a:bodyPr wrap="square" lIns="0" tIns="0" rIns="0" bIns="0" rtlCol="0" anchor="ctr"/>
           <a:lstStyle/>
           <a:p>
-            <a:pPr indent="0" marL="0">
+            <a:pPr marL="0" indent="0">
               <a:buNone/>
             </a:pPr>
             <a:endParaRPr lang="en-US" sz="1200" dirty="0"/>
@@ -10464,7 +10192,7 @@
           <a:bodyPr wrap="square" lIns="0" tIns="0" rIns="0" bIns="0" rtlCol="0" anchor="ctr"/>
           <a:lstStyle/>
           <a:p>
-            <a:pPr indent="0" marL="0">
+            <a:pPr marL="0" indent="0">
               <a:buNone/>
             </a:pPr>
             <a:r>
@@ -10498,6 +10226,7 @@
         <a:solidFill>
           <a:srgbClr val="E8F4F8"/>
         </a:solidFill>
+        <a:effectLst/>
       </p:bgPr>
     </p:bg>
     <p:spTree>
@@ -10585,7 +10314,7 @@
           <a:bodyPr wrap="square" lIns="0" tIns="0" rIns="0" bIns="0" rtlCol="0" anchor="ctr"/>
           <a:lstStyle/>
           <a:p>
-            <a:pPr indent="0" marL="0">
+            <a:pPr marL="0" indent="0">
               <a:buNone/>
             </a:pPr>
             <a:r>
@@ -10624,7 +10353,7 @@
           <a:bodyPr wrap="square" lIns="0" tIns="0" rIns="0" bIns="0" rtlCol="0" anchor="ctr"/>
           <a:lstStyle/>
           <a:p>
-            <a:pPr indent="0" marL="0">
+            <a:pPr marL="0" indent="0">
               <a:buNone/>
             </a:pPr>
             <a:r>
@@ -10666,7 +10395,7 @@
             <a:prstDash val="solid"/>
           </a:ln>
           <a:effectLst>
-            <a:outerShdw sx="100000" sy="100000" kx="0" ky="0" algn="bl" rotWithShape="0" blurRad="63500" dist="25400" dir="8100000">
+            <a:outerShdw blurRad="63500" dist="25400" dir="8100000" algn="bl" rotWithShape="0">
               <a:srgbClr val="000000">
                 <a:alpha val="10000"/>
               </a:srgbClr>
@@ -10720,7 +10449,7 @@
           <a:bodyPr wrap="square" lIns="0" tIns="0" rIns="0" bIns="0" rtlCol="0" anchor="ctr"/>
           <a:lstStyle/>
           <a:p>
-            <a:pPr indent="0" marL="0">
+            <a:pPr marL="0" indent="0">
               <a:buNone/>
             </a:pPr>
             <a:r>
@@ -10759,7 +10488,7 @@
           <a:bodyPr wrap="square" lIns="0" tIns="0" rIns="0" bIns="0" rtlCol="0" anchor="ctr"/>
           <a:lstStyle/>
           <a:p>
-            <a:pPr indent="0" marL="0">
+            <a:pPr marL="0" indent="0">
               <a:buNone/>
             </a:pPr>
             <a:r>
@@ -10776,7 +10505,7 @@
             <a:endParaRPr lang="en-US" sz="1200" dirty="0"/>
           </a:p>
           <a:p>
-            <a:pPr indent="0" marL="0">
+            <a:pPr marL="0" indent="0">
               <a:buNone/>
             </a:pPr>
             <a:r>
@@ -10793,7 +10522,7 @@
             <a:endParaRPr lang="en-US" sz="1200" dirty="0"/>
           </a:p>
           <a:p>
-            <a:pPr indent="0" marL="0">
+            <a:pPr marL="0" indent="0">
               <a:buNone/>
             </a:pPr>
             <a:r>
@@ -10832,7 +10561,7 @@
           <a:bodyPr wrap="square" lIns="0" tIns="0" rIns="0" bIns="0" rtlCol="0" anchor="ctr"/>
           <a:lstStyle/>
           <a:p>
-            <a:pPr indent="0" marL="0">
+            <a:pPr marL="0" indent="0">
               <a:buNone/>
             </a:pPr>
             <a:r>
@@ -10921,7 +10650,7 @@
           <a:bodyPr wrap="square" lIns="0" tIns="0" rIns="0" bIns="0" rtlCol="0" anchor="ctr"/>
           <a:lstStyle/>
           <a:p>
-            <a:pPr indent="0" marL="0">
+            <a:pPr marL="0" indent="0">
               <a:buNone/>
             </a:pPr>
             <a:r>
@@ -10960,7 +10689,7 @@
           <a:bodyPr wrap="square" lIns="0" tIns="0" rIns="0" bIns="0" rtlCol="0" anchor="ctr"/>
           <a:lstStyle/>
           <a:p>
-            <a:pPr indent="0" marL="0">
+            <a:pPr marL="0" indent="0">
               <a:buNone/>
             </a:pPr>
             <a:r>
@@ -10999,7 +10728,7 @@
           <a:bodyPr wrap="square" lIns="0" tIns="0" rIns="0" bIns="0" rtlCol="0" anchor="ctr"/>
           <a:lstStyle/>
           <a:p>
-            <a:pPr indent="0" marL="0">
+            <a:pPr marL="0" indent="0">
               <a:buNone/>
             </a:pPr>
             <a:r>
@@ -11088,7 +10817,7 @@
           <a:bodyPr wrap="square" lIns="0" tIns="0" rIns="0" bIns="0" rtlCol="0" anchor="ctr"/>
           <a:lstStyle/>
           <a:p>
-            <a:pPr indent="0" marL="0">
+            <a:pPr marL="0" indent="0">
               <a:buNone/>
             </a:pPr>
             <a:r>
@@ -11127,7 +10856,7 @@
           <a:bodyPr wrap="square" lIns="0" tIns="0" rIns="0" bIns="0" rtlCol="0" anchor="ctr"/>
           <a:lstStyle/>
           <a:p>
-            <a:pPr indent="0" marL="0">
+            <a:pPr marL="0" indent="0">
               <a:buNone/>
             </a:pPr>
             <a:r>
@@ -11166,7 +10895,7 @@
           <a:bodyPr wrap="square" lIns="0" tIns="0" rIns="0" bIns="0" rtlCol="0" anchor="ctr"/>
           <a:lstStyle/>
           <a:p>
-            <a:pPr indent="0" marL="0">
+            <a:pPr marL="0" indent="0">
               <a:buNone/>
             </a:pPr>
             <a:r>
@@ -11255,7 +10984,7 @@
           <a:bodyPr wrap="square" lIns="0" tIns="0" rIns="0" bIns="0" rtlCol="0" anchor="ctr"/>
           <a:lstStyle/>
           <a:p>
-            <a:pPr indent="0" marL="0">
+            <a:pPr marL="0" indent="0">
               <a:buNone/>
             </a:pPr>
             <a:r>
@@ -11294,7 +11023,7 @@
           <a:bodyPr wrap="square" lIns="0" tIns="0" rIns="0" bIns="0" rtlCol="0" anchor="ctr"/>
           <a:lstStyle/>
           <a:p>
-            <a:pPr indent="0" marL="0">
+            <a:pPr marL="0" indent="0">
               <a:buNone/>
             </a:pPr>
             <a:r>
@@ -11333,7 +11062,7 @@
           <a:bodyPr wrap="square" lIns="0" tIns="0" rIns="0" bIns="0" rtlCol="0" anchor="ctr"/>
           <a:lstStyle/>
           <a:p>
-            <a:pPr indent="0" marL="0">
+            <a:pPr marL="0" indent="0">
               <a:buNone/>
             </a:pPr>
             <a:r>
@@ -11397,7 +11126,7 @@
           <a:bodyPr wrap="square" lIns="0" tIns="0" rIns="0" bIns="0" rtlCol="0" anchor="ctr"/>
           <a:lstStyle/>
           <a:p>
-            <a:pPr algn="ctr" indent="0" marL="0">
+            <a:pPr marL="0" indent="0" algn="ctr">
               <a:buNone/>
             </a:pPr>
             <a:r>
@@ -11439,7 +11168,7 @@
             <a:prstDash val="solid"/>
           </a:ln>
           <a:effectLst>
-            <a:outerShdw sx="100000" sy="100000" kx="0" ky="0" algn="bl" rotWithShape="0" blurRad="63500" dist="25400" dir="8100000">
+            <a:outerShdw blurRad="63500" dist="25400" dir="8100000" algn="bl" rotWithShape="0">
               <a:srgbClr val="000000">
                 <a:alpha val="10000"/>
               </a:srgbClr>
@@ -11493,7 +11222,7 @@
           <a:bodyPr wrap="square" lIns="0" tIns="0" rIns="0" bIns="0" rtlCol="0" anchor="ctr"/>
           <a:lstStyle/>
           <a:p>
-            <a:pPr indent="0" marL="0">
+            <a:pPr marL="0" indent="0">
               <a:buNone/>
             </a:pPr>
             <a:r>
@@ -11557,7 +11286,7 @@
           <a:bodyPr wrap="square" lIns="0" tIns="0" rIns="0" bIns="0" rtlCol="0" anchor="ctr"/>
           <a:lstStyle/>
           <a:p>
-            <a:pPr indent="0" marL="0">
+            <a:pPr marL="0" indent="0">
               <a:buNone/>
             </a:pPr>
             <a:r>
@@ -11621,7 +11350,7 @@
           <a:bodyPr wrap="square" lIns="0" tIns="0" rIns="0" bIns="0" rtlCol="0" anchor="ctr"/>
           <a:lstStyle/>
           <a:p>
-            <a:pPr algn="ctr" indent="0" marL="0">
+            <a:pPr marL="0" indent="0" algn="ctr">
               <a:buNone/>
             </a:pPr>
             <a:r>
@@ -11685,7 +11414,7 @@
           <a:bodyPr wrap="square" lIns="0" tIns="0" rIns="0" bIns="0" rtlCol="0" anchor="ctr"/>
           <a:lstStyle/>
           <a:p>
-            <a:pPr indent="0" marL="0">
+            <a:pPr marL="0" indent="0">
               <a:buNone/>
             </a:pPr>
             <a:r>
@@ -11749,7 +11478,7 @@
           <a:bodyPr wrap="square" lIns="0" tIns="0" rIns="0" bIns="0" rtlCol="0" anchor="ctr"/>
           <a:lstStyle/>
           <a:p>
-            <a:pPr algn="ctr" indent="0" marL="0">
+            <a:pPr marL="0" indent="0" algn="ctr">
               <a:buNone/>
             </a:pPr>
             <a:r>
@@ -11813,7 +11542,7 @@
           <a:bodyPr wrap="square" lIns="0" tIns="0" rIns="0" bIns="0" rtlCol="0" anchor="ctr"/>
           <a:lstStyle/>
           <a:p>
-            <a:pPr indent="0" marL="0">
+            <a:pPr marL="0" indent="0">
               <a:buNone/>
             </a:pPr>
             <a:r>
@@ -11877,7 +11606,7 @@
           <a:bodyPr wrap="square" lIns="0" tIns="0" rIns="0" bIns="0" rtlCol="0" anchor="ctr"/>
           <a:lstStyle/>
           <a:p>
-            <a:pPr algn="ctr" indent="0" marL="0">
+            <a:pPr marL="0" indent="0" algn="ctr">
               <a:buNone/>
             </a:pPr>
             <a:r>
@@ -11941,7 +11670,7 @@
           <a:bodyPr wrap="square" lIns="0" tIns="0" rIns="0" bIns="0" rtlCol="0" anchor="ctr"/>
           <a:lstStyle/>
           <a:p>
-            <a:pPr indent="0" marL="0">
+            <a:pPr marL="0" indent="0">
               <a:buNone/>
             </a:pPr>
             <a:r>
@@ -12005,7 +11734,7 @@
           <a:bodyPr wrap="square" lIns="0" tIns="0" rIns="0" bIns="0" rtlCol="0" anchor="ctr"/>
           <a:lstStyle/>
           <a:p>
-            <a:pPr algn="ctr" indent="0" marL="0">
+            <a:pPr marL="0" indent="0" algn="ctr">
               <a:buNone/>
             </a:pPr>
             <a:r>
@@ -12069,7 +11798,7 @@
           <a:bodyPr wrap="square" lIns="0" tIns="0" rIns="0" bIns="0" rtlCol="0" anchor="ctr"/>
           <a:lstStyle/>
           <a:p>
-            <a:pPr indent="0" marL="0">
+            <a:pPr marL="0" indent="0">
               <a:buNone/>
             </a:pPr>
             <a:r>
@@ -12133,7 +11862,7 @@
           <a:bodyPr wrap="square" lIns="0" tIns="0" rIns="0" bIns="0" rtlCol="0" anchor="ctr"/>
           <a:lstStyle/>
           <a:p>
-            <a:pPr algn="ctr" indent="0" marL="0">
+            <a:pPr marL="0" indent="0" algn="ctr">
               <a:buNone/>
             </a:pPr>
             <a:r>
@@ -12197,7 +11926,7 @@
           <a:bodyPr wrap="square" lIns="0" tIns="0" rIns="0" bIns="0" rtlCol="0" anchor="ctr"/>
           <a:lstStyle/>
           <a:p>
-            <a:pPr indent="0" marL="0">
+            <a:pPr marL="0" indent="0">
               <a:buNone/>
             </a:pPr>
             <a:r>
@@ -12261,7 +11990,7 @@
           <a:bodyPr wrap="square" lIns="0" tIns="0" rIns="0" bIns="0" rtlCol="0" anchor="ctr"/>
           <a:lstStyle/>
           <a:p>
-            <a:pPr algn="ctr" indent="0" marL="0">
+            <a:pPr marL="0" indent="0" algn="ctr">
               <a:buNone/>
             </a:pPr>
             <a:r>
@@ -12325,7 +12054,7 @@
           <a:bodyPr wrap="square" lIns="0" tIns="0" rIns="0" bIns="0" rtlCol="0" anchor="ctr"/>
           <a:lstStyle/>
           <a:p>
-            <a:pPr indent="0" marL="0">
+            <a:pPr marL="0" indent="0">
               <a:buNone/>
             </a:pPr>
             <a:r>
@@ -12389,7 +12118,7 @@
           <a:bodyPr wrap="square" lIns="0" tIns="0" rIns="0" bIns="0" rtlCol="0" anchor="ctr"/>
           <a:lstStyle/>
           <a:p>
-            <a:pPr algn="ctr" indent="0" marL="0">
+            <a:pPr marL="0" indent="0" algn="ctr">
               <a:buNone/>
             </a:pPr>
             <a:r>
@@ -12423,6 +12152,7 @@
         <a:solidFill>
           <a:srgbClr val="0D1B2A"/>
         </a:solidFill>
+        <a:effectLst/>
       </p:bgPr>
     </p:bg>
     <p:spTree>
@@ -12510,7 +12240,7 @@
           <a:bodyPr wrap="square" lIns="0" tIns="0" rIns="0" bIns="0" rtlCol="0" anchor="ctr"/>
           <a:lstStyle/>
           <a:p>
-            <a:pPr algn="ctr" indent="0" marL="0">
+            <a:pPr marL="0" indent="0" algn="ctr">
               <a:buNone/>
             </a:pPr>
             <a:r>
@@ -12599,7 +12329,7 @@
           <a:bodyPr wrap="square" lIns="0" tIns="0" rIns="0" bIns="0" rtlCol="0" anchor="ctr"/>
           <a:lstStyle/>
           <a:p>
-            <a:pPr algn="ctr" indent="0" marL="0">
+            <a:pPr marL="0" indent="0" algn="ctr">
               <a:buNone/>
             </a:pPr>
             <a:r>
@@ -12638,7 +12368,7 @@
           <a:bodyPr wrap="square" lIns="0" tIns="0" rIns="0" bIns="0" rtlCol="0" anchor="ctr"/>
           <a:lstStyle/>
           <a:p>
-            <a:pPr indent="0" marL="0">
+            <a:pPr marL="0" indent="0">
               <a:buNone/>
             </a:pPr>
             <a:r>
@@ -12677,7 +12407,7 @@
           <a:bodyPr wrap="square" lIns="0" tIns="0" rIns="0" bIns="0" rtlCol="0" anchor="ctr"/>
           <a:lstStyle/>
           <a:p>
-            <a:pPr indent="0" marL="0">
+            <a:pPr marL="0" indent="0">
               <a:buNone/>
             </a:pPr>
             <a:r>
@@ -12766,7 +12496,7 @@
           <a:bodyPr wrap="square" lIns="0" tIns="0" rIns="0" bIns="0" rtlCol="0" anchor="ctr"/>
           <a:lstStyle/>
           <a:p>
-            <a:pPr algn="ctr" indent="0" marL="0">
+            <a:pPr marL="0" indent="0" algn="ctr">
               <a:buNone/>
             </a:pPr>
             <a:r>
@@ -12805,7 +12535,7 @@
           <a:bodyPr wrap="square" lIns="0" tIns="0" rIns="0" bIns="0" rtlCol="0" anchor="ctr"/>
           <a:lstStyle/>
           <a:p>
-            <a:pPr indent="0" marL="0">
+            <a:pPr marL="0" indent="0">
               <a:buNone/>
             </a:pPr>
             <a:r>
@@ -12844,7 +12574,7 @@
           <a:bodyPr wrap="square" lIns="0" tIns="0" rIns="0" bIns="0" rtlCol="0" anchor="ctr"/>
           <a:lstStyle/>
           <a:p>
-            <a:pPr indent="0" marL="0">
+            <a:pPr marL="0" indent="0">
               <a:buNone/>
             </a:pPr>
             <a:r>
@@ -12933,7 +12663,7 @@
           <a:bodyPr wrap="square" lIns="0" tIns="0" rIns="0" bIns="0" rtlCol="0" anchor="ctr"/>
           <a:lstStyle/>
           <a:p>
-            <a:pPr algn="ctr" indent="0" marL="0">
+            <a:pPr marL="0" indent="0" algn="ctr">
               <a:buNone/>
             </a:pPr>
             <a:r>
@@ -12972,7 +12702,7 @@
           <a:bodyPr wrap="square" lIns="0" tIns="0" rIns="0" bIns="0" rtlCol="0" anchor="ctr"/>
           <a:lstStyle/>
           <a:p>
-            <a:pPr indent="0" marL="0">
+            <a:pPr marL="0" indent="0">
               <a:buNone/>
             </a:pPr>
             <a:r>
@@ -13011,7 +12741,7 @@
           <a:bodyPr wrap="square" lIns="0" tIns="0" rIns="0" bIns="0" rtlCol="0" anchor="ctr"/>
           <a:lstStyle/>
           <a:p>
-            <a:pPr indent="0" marL="0">
+            <a:pPr marL="0" indent="0">
               <a:buNone/>
             </a:pPr>
             <a:r>
@@ -13100,7 +12830,7 @@
           <a:bodyPr wrap="square" lIns="0" tIns="0" rIns="0" bIns="0" rtlCol="0" anchor="ctr"/>
           <a:lstStyle/>
           <a:p>
-            <a:pPr algn="ctr" indent="0" marL="0">
+            <a:pPr marL="0" indent="0" algn="ctr">
               <a:buNone/>
             </a:pPr>
             <a:r>
@@ -13139,7 +12869,7 @@
           <a:bodyPr wrap="square" lIns="0" tIns="0" rIns="0" bIns="0" rtlCol="0" anchor="ctr"/>
           <a:lstStyle/>
           <a:p>
-            <a:pPr indent="0" marL="0">
+            <a:pPr marL="0" indent="0">
               <a:buNone/>
             </a:pPr>
             <a:r>
@@ -13178,7 +12908,7 @@
           <a:bodyPr wrap="square" lIns="0" tIns="0" rIns="0" bIns="0" rtlCol="0" anchor="ctr"/>
           <a:lstStyle/>
           <a:p>
-            <a:pPr indent="0" marL="0">
+            <a:pPr marL="0" indent="0">
               <a:buNone/>
             </a:pPr>
             <a:r>
@@ -13267,7 +12997,7 @@
           <a:bodyPr wrap="square" lIns="0" tIns="0" rIns="0" bIns="0" rtlCol="0" anchor="ctr"/>
           <a:lstStyle/>
           <a:p>
-            <a:pPr algn="ctr" indent="0" marL="0">
+            <a:pPr marL="0" indent="0" algn="ctr">
               <a:buNone/>
             </a:pPr>
             <a:r>
@@ -13306,7 +13036,7 @@
           <a:bodyPr wrap="square" lIns="0" tIns="0" rIns="0" bIns="0" rtlCol="0" anchor="ctr"/>
           <a:lstStyle/>
           <a:p>
-            <a:pPr indent="0" marL="0">
+            <a:pPr marL="0" indent="0">
               <a:buNone/>
             </a:pPr>
             <a:r>
@@ -13345,7 +13075,7 @@
           <a:bodyPr wrap="square" lIns="0" tIns="0" rIns="0" bIns="0" rtlCol="0" anchor="ctr"/>
           <a:lstStyle/>
           <a:p>
-            <a:pPr indent="0" marL="0">
+            <a:pPr marL="0" indent="0">
               <a:buNone/>
             </a:pPr>
             <a:r>
@@ -13434,7 +13164,7 @@
           <a:bodyPr wrap="square" lIns="0" tIns="0" rIns="0" bIns="0" rtlCol="0" anchor="ctr"/>
           <a:lstStyle/>
           <a:p>
-            <a:pPr algn="ctr" indent="0" marL="0">
+            <a:pPr marL="0" indent="0" algn="ctr">
               <a:buNone/>
             </a:pPr>
             <a:r>
@@ -13473,7 +13203,7 @@
           <a:bodyPr wrap="square" lIns="0" tIns="0" rIns="0" bIns="0" rtlCol="0" anchor="ctr"/>
           <a:lstStyle/>
           <a:p>
-            <a:pPr indent="0" marL="0">
+            <a:pPr marL="0" indent="0">
               <a:buNone/>
             </a:pPr>
             <a:r>
@@ -13512,7 +13242,7 @@
           <a:bodyPr wrap="square" lIns="0" tIns="0" rIns="0" bIns="0" rtlCol="0" anchor="ctr"/>
           <a:lstStyle/>
           <a:p>
-            <a:pPr indent="0" marL="0">
+            <a:pPr marL="0" indent="0">
               <a:buNone/>
             </a:pPr>
             <a:r>
@@ -13546,6 +13276,7 @@
         <a:solidFill>
           <a:srgbClr val="E8F4F8"/>
         </a:solidFill>
+        <a:effectLst/>
       </p:bgPr>
     </p:bg>
     <p:spTree>
@@ -13633,7 +13364,7 @@
           <a:bodyPr wrap="square" lIns="0" tIns="0" rIns="0" bIns="0" rtlCol="0" anchor="ctr"/>
           <a:lstStyle/>
           <a:p>
-            <a:pPr indent="0" marL="0">
+            <a:pPr marL="0" indent="0">
               <a:buNone/>
             </a:pPr>
             <a:r>
@@ -13672,7 +13403,7 @@
           <a:bodyPr wrap="square" lIns="0" tIns="0" rIns="0" bIns="0" rtlCol="0" anchor="ctr"/>
           <a:lstStyle/>
           <a:p>
-            <a:pPr indent="0" marL="0">
+            <a:pPr marL="0" indent="0">
               <a:buNone/>
             </a:pPr>
             <a:r>
@@ -13714,7 +13445,7 @@
             <a:prstDash val="solid"/>
           </a:ln>
           <a:effectLst>
-            <a:outerShdw sx="100000" sy="100000" kx="0" ky="0" algn="bl" rotWithShape="0" blurRad="76200" dist="25400" dir="8100000">
+            <a:outerShdw blurRad="76200" dist="25400" dir="8100000" algn="bl" rotWithShape="0">
               <a:srgbClr val="000000">
                 <a:alpha val="12000"/>
               </a:srgbClr>
@@ -13768,7 +13499,7 @@
           <a:bodyPr wrap="square" lIns="0" tIns="0" rIns="0" bIns="0" rtlCol="0" anchor="ctr"/>
           <a:lstStyle/>
           <a:p>
-            <a:pPr algn="ctr" indent="0" marL="0">
+            <a:pPr marL="0" indent="0" algn="ctr">
               <a:buNone/>
             </a:pPr>
             <a:r>
@@ -13807,7 +13538,7 @@
           <a:bodyPr wrap="square" lIns="101600" tIns="101600" rIns="101600" bIns="101600" rtlCol="0" anchor="ctr"/>
           <a:lstStyle/>
           <a:p>
-            <a:pPr indent="0" marL="0">
+            <a:pPr marL="0" indent="0">
               <a:buNone/>
             </a:pPr>
             <a:r>
@@ -13846,7 +13577,7 @@
           <a:bodyPr wrap="square" lIns="0" tIns="0" rIns="0" bIns="0" rtlCol="0" anchor="ctr"/>
           <a:lstStyle/>
           <a:p>
-            <a:pPr indent="0" marL="0">
+            <a:pPr marL="0" indent="0">
               <a:buNone/>
             </a:pPr>
             <a:r>
@@ -13885,7 +13616,7 @@
           <a:bodyPr wrap="square" lIns="0" tIns="0" rIns="0" bIns="0" rtlCol="0" anchor="ctr"/>
           <a:lstStyle/>
           <a:p>
-            <a:pPr indent="0" marL="0">
+            <a:pPr marL="0" indent="0">
               <a:buNone/>
             </a:pPr>
             <a:r>
@@ -13924,7 +13655,7 @@
           <a:bodyPr wrap="square" lIns="0" tIns="0" rIns="0" bIns="0" rtlCol="0" anchor="ctr"/>
           <a:lstStyle/>
           <a:p>
-            <a:pPr indent="0" marL="0">
+            <a:pPr marL="0" indent="0">
               <a:buNone/>
             </a:pPr>
             <a:r>
@@ -13963,7 +13694,7 @@
           <a:bodyPr wrap="square" lIns="0" tIns="0" rIns="0" bIns="0" rtlCol="0" anchor="ctr"/>
           <a:lstStyle/>
           <a:p>
-            <a:pPr indent="0" marL="0">
+            <a:pPr marL="0" indent="0">
               <a:buNone/>
             </a:pPr>
             <a:r>
@@ -14002,7 +13733,7 @@
           <a:bodyPr wrap="square" lIns="0" tIns="0" rIns="0" bIns="0" rtlCol="0" anchor="ctr"/>
           <a:lstStyle/>
           <a:p>
-            <a:pPr indent="0" marL="0">
+            <a:pPr marL="0" indent="0">
               <a:buNone/>
             </a:pPr>
             <a:r>
@@ -14041,7 +13772,7 @@
           <a:bodyPr wrap="square" lIns="0" tIns="0" rIns="0" bIns="0" rtlCol="0" anchor="ctr"/>
           <a:lstStyle/>
           <a:p>
-            <a:pPr indent="0" marL="0">
+            <a:pPr marL="0" indent="0">
               <a:buNone/>
             </a:pPr>
             <a:r>
@@ -14080,7 +13811,7 @@
           <a:bodyPr wrap="square" lIns="0" tIns="0" rIns="0" bIns="0" rtlCol="0" anchor="ctr"/>
           <a:lstStyle/>
           <a:p>
-            <a:pPr indent="0" marL="0">
+            <a:pPr marL="0" indent="0">
               <a:buNone/>
             </a:pPr>
             <a:r>
@@ -14122,7 +13853,7 @@
             <a:prstDash val="solid"/>
           </a:ln>
           <a:effectLst>
-            <a:outerShdw sx="100000" sy="100000" kx="0" ky="0" algn="bl" rotWithShape="0" blurRad="76200" dist="25400" dir="8100000">
+            <a:outerShdw blurRad="76200" dist="25400" dir="8100000" algn="bl" rotWithShape="0">
               <a:srgbClr val="000000">
                 <a:alpha val="12000"/>
               </a:srgbClr>
@@ -14176,7 +13907,7 @@
           <a:bodyPr wrap="square" lIns="0" tIns="0" rIns="0" bIns="0" rtlCol="0" anchor="ctr"/>
           <a:lstStyle/>
           <a:p>
-            <a:pPr algn="ctr" indent="0" marL="0">
+            <a:pPr marL="0" indent="0" algn="ctr">
               <a:buNone/>
             </a:pPr>
             <a:r>
@@ -14215,7 +13946,7 @@
           <a:bodyPr wrap="square" lIns="101600" tIns="101600" rIns="101600" bIns="101600" rtlCol="0" anchor="ctr"/>
           <a:lstStyle/>
           <a:p>
-            <a:pPr indent="0" marL="0">
+            <a:pPr marL="0" indent="0">
               <a:buNone/>
             </a:pPr>
             <a:r>
@@ -14254,7 +13985,7 @@
           <a:bodyPr wrap="square" lIns="0" tIns="0" rIns="0" bIns="0" rtlCol="0" anchor="ctr"/>
           <a:lstStyle/>
           <a:p>
-            <a:pPr indent="0" marL="0">
+            <a:pPr marL="0" indent="0">
               <a:buNone/>
             </a:pPr>
             <a:r>
@@ -14293,7 +14024,7 @@
           <a:bodyPr wrap="square" lIns="0" tIns="0" rIns="0" bIns="0" rtlCol="0" anchor="ctr"/>
           <a:lstStyle/>
           <a:p>
-            <a:pPr indent="0" marL="0">
+            <a:pPr marL="0" indent="0">
               <a:buNone/>
             </a:pPr>
             <a:r>
@@ -14332,7 +14063,7 @@
           <a:bodyPr wrap="square" lIns="0" tIns="0" rIns="0" bIns="0" rtlCol="0" anchor="ctr"/>
           <a:lstStyle/>
           <a:p>
-            <a:pPr indent="0" marL="0">
+            <a:pPr marL="0" indent="0">
               <a:buNone/>
             </a:pPr>
             <a:r>
@@ -14371,7 +14102,7 @@
           <a:bodyPr wrap="square" lIns="0" tIns="0" rIns="0" bIns="0" rtlCol="0" anchor="ctr"/>
           <a:lstStyle/>
           <a:p>
-            <a:pPr indent="0" marL="0">
+            <a:pPr marL="0" indent="0">
               <a:buNone/>
             </a:pPr>
             <a:r>
@@ -14410,7 +14141,7 @@
           <a:bodyPr wrap="square" lIns="0" tIns="0" rIns="0" bIns="0" rtlCol="0" anchor="ctr"/>
           <a:lstStyle/>
           <a:p>
-            <a:pPr indent="0" marL="0">
+            <a:pPr marL="0" indent="0">
               <a:buNone/>
             </a:pPr>
             <a:r>
@@ -14449,7 +14180,7 @@
           <a:bodyPr wrap="square" lIns="0" tIns="0" rIns="0" bIns="0" rtlCol="0" anchor="ctr"/>
           <a:lstStyle/>
           <a:p>
-            <a:pPr indent="0" marL="0">
+            <a:pPr marL="0" indent="0">
               <a:buNone/>
             </a:pPr>
             <a:r>
@@ -14488,7 +14219,7 @@
           <a:bodyPr wrap="square" lIns="0" tIns="0" rIns="0" bIns="0" rtlCol="0" anchor="ctr"/>
           <a:lstStyle/>
           <a:p>
-            <a:pPr indent="0" marL="0">
+            <a:pPr marL="0" indent="0">
               <a:buNone/>
             </a:pPr>
             <a:r>
@@ -14530,7 +14261,7 @@
             <a:prstDash val="solid"/>
           </a:ln>
           <a:effectLst>
-            <a:outerShdw sx="100000" sy="100000" kx="0" ky="0" algn="bl" rotWithShape="0" blurRad="76200" dist="25400" dir="8100000">
+            <a:outerShdw blurRad="76200" dist="25400" dir="8100000" algn="bl" rotWithShape="0">
               <a:srgbClr val="000000">
                 <a:alpha val="12000"/>
               </a:srgbClr>
@@ -14584,7 +14315,7 @@
           <a:bodyPr wrap="square" lIns="0" tIns="0" rIns="0" bIns="0" rtlCol="0" anchor="ctr"/>
           <a:lstStyle/>
           <a:p>
-            <a:pPr algn="ctr" indent="0" marL="0">
+            <a:pPr marL="0" indent="0" algn="ctr">
               <a:buNone/>
             </a:pPr>
             <a:r>
@@ -14623,7 +14354,7 @@
           <a:bodyPr wrap="square" lIns="101600" tIns="101600" rIns="101600" bIns="101600" rtlCol="0" anchor="ctr"/>
           <a:lstStyle/>
           <a:p>
-            <a:pPr indent="0" marL="0">
+            <a:pPr marL="0" indent="0">
               <a:buNone/>
             </a:pPr>
             <a:r>
@@ -14662,7 +14393,7 @@
           <a:bodyPr wrap="square" lIns="0" tIns="0" rIns="0" bIns="0" rtlCol="0" anchor="ctr"/>
           <a:lstStyle/>
           <a:p>
-            <a:pPr indent="0" marL="0">
+            <a:pPr marL="0" indent="0">
               <a:buNone/>
             </a:pPr>
             <a:r>
@@ -14701,7 +14432,7 @@
           <a:bodyPr wrap="square" lIns="0" tIns="0" rIns="0" bIns="0" rtlCol="0" anchor="ctr"/>
           <a:lstStyle/>
           <a:p>
-            <a:pPr indent="0" marL="0">
+            <a:pPr marL="0" indent="0">
               <a:buNone/>
             </a:pPr>
             <a:r>
@@ -14740,7 +14471,7 @@
           <a:bodyPr wrap="square" lIns="0" tIns="0" rIns="0" bIns="0" rtlCol="0" anchor="ctr"/>
           <a:lstStyle/>
           <a:p>
-            <a:pPr indent="0" marL="0">
+            <a:pPr marL="0" indent="0">
               <a:buNone/>
             </a:pPr>
             <a:r>
@@ -14779,7 +14510,7 @@
           <a:bodyPr wrap="square" lIns="0" tIns="0" rIns="0" bIns="0" rtlCol="0" anchor="ctr"/>
           <a:lstStyle/>
           <a:p>
-            <a:pPr indent="0" marL="0">
+            <a:pPr marL="0" indent="0">
               <a:buNone/>
             </a:pPr>
             <a:r>
@@ -14818,7 +14549,7 @@
           <a:bodyPr wrap="square" lIns="0" tIns="0" rIns="0" bIns="0" rtlCol="0" anchor="ctr"/>
           <a:lstStyle/>
           <a:p>
-            <a:pPr indent="0" marL="0">
+            <a:pPr marL="0" indent="0">
               <a:buNone/>
             </a:pPr>
             <a:r>
@@ -14857,7 +14588,7 @@
           <a:bodyPr wrap="square" lIns="0" tIns="0" rIns="0" bIns="0" rtlCol="0" anchor="ctr"/>
           <a:lstStyle/>
           <a:p>
-            <a:pPr indent="0" marL="0">
+            <a:pPr marL="0" indent="0">
               <a:buNone/>
             </a:pPr>
             <a:r>
@@ -14896,7 +14627,7 @@
           <a:bodyPr wrap="square" lIns="0" tIns="0" rIns="0" bIns="0" rtlCol="0" anchor="ctr"/>
           <a:lstStyle/>
           <a:p>
-            <a:pPr indent="0" marL="0">
+            <a:pPr marL="0" indent="0">
               <a:buNone/>
             </a:pPr>
             <a:r>
@@ -14930,6 +14661,7 @@
         <a:solidFill>
           <a:srgbClr val="E8F4F8"/>
         </a:solidFill>
+        <a:effectLst/>
       </p:bgPr>
     </p:bg>
     <p:spTree>
@@ -15017,7 +14749,7 @@
           <a:bodyPr wrap="square" lIns="0" tIns="0" rIns="0" bIns="0" rtlCol="0" anchor="ctr"/>
           <a:lstStyle/>
           <a:p>
-            <a:pPr indent="0" marL="0">
+            <a:pPr marL="0" indent="0">
               <a:buNone/>
             </a:pPr>
             <a:r>
@@ -15059,7 +14791,7 @@
             <a:prstDash val="solid"/>
           </a:ln>
           <a:effectLst>
-            <a:outerShdw sx="100000" sy="100000" kx="0" ky="0" algn="bl" rotWithShape="0" blurRad="63500" dist="25400" dir="8100000">
+            <a:outerShdw blurRad="63500" dist="25400" dir="8100000" algn="bl" rotWithShape="0">
               <a:srgbClr val="000000">
                 <a:alpha val="10000"/>
               </a:srgbClr>
@@ -15113,7 +14845,7 @@
           <a:bodyPr wrap="square" lIns="0" tIns="0" rIns="0" bIns="0" rtlCol="0" anchor="ctr"/>
           <a:lstStyle/>
           <a:p>
-            <a:pPr indent="0" marL="0">
+            <a:pPr marL="0" indent="0">
               <a:buNone/>
             </a:pPr>
             <a:r>
@@ -15152,7 +14884,7 @@
           <a:bodyPr wrap="square" lIns="0" tIns="0" rIns="0" bIns="0" rtlCol="0" anchor="ctr"/>
           <a:lstStyle/>
           <a:p>
-            <a:pPr indent="0" marL="0">
+            <a:pPr marL="0" indent="0">
               <a:buNone/>
             </a:pPr>
             <a:r>
@@ -15191,7 +14923,7 @@
           <a:bodyPr wrap="square" lIns="0" tIns="0" rIns="0" bIns="0" rtlCol="0" anchor="ctr"/>
           <a:lstStyle/>
           <a:p>
-            <a:pPr indent="0" marL="0">
+            <a:pPr marL="0" indent="0">
               <a:buNone/>
             </a:pPr>
             <a:r>
@@ -15230,7 +14962,7 @@
           <a:bodyPr wrap="square" lIns="0" tIns="0" rIns="0" bIns="0" rtlCol="0" anchor="ctr"/>
           <a:lstStyle/>
           <a:p>
-            <a:pPr indent="0" marL="0">
+            <a:pPr marL="0" indent="0">
               <a:buNone/>
             </a:pPr>
             <a:r>
@@ -15294,7 +15026,7 @@
           <a:bodyPr wrap="square" lIns="0" tIns="0" rIns="0" bIns="0" rtlCol="0" anchor="ctr"/>
           <a:lstStyle/>
           <a:p>
-            <a:pPr algn="ctr" indent="0" marL="0">
+            <a:pPr marL="0" indent="0" algn="ctr">
               <a:buNone/>
             </a:pPr>
             <a:r>
@@ -15333,7 +15065,7 @@
           <a:bodyPr wrap="square" lIns="50800" tIns="50800" rIns="50800" bIns="50800" rtlCol="0" anchor="ctr"/>
           <a:lstStyle/>
           <a:p>
-            <a:pPr indent="0" marL="0">
+            <a:pPr marL="0" indent="0">
               <a:buNone/>
             </a:pPr>
             <a:r>
@@ -15372,7 +15104,7 @@
           <a:bodyPr wrap="square" lIns="50800" tIns="50800" rIns="50800" bIns="50800" rtlCol="0" anchor="ctr"/>
           <a:lstStyle/>
           <a:p>
-            <a:pPr indent="0" marL="0">
+            <a:pPr marL="0" indent="0">
               <a:buNone/>
             </a:pPr>
             <a:r>
@@ -15436,7 +15168,7 @@
           <a:bodyPr wrap="square" lIns="0" tIns="0" rIns="0" bIns="0" rtlCol="0" anchor="ctr"/>
           <a:lstStyle/>
           <a:p>
-            <a:pPr algn="ctr" indent="0" marL="0">
+            <a:pPr marL="0" indent="0" algn="ctr">
               <a:buNone/>
             </a:pPr>
             <a:r>
@@ -15475,7 +15207,7 @@
           <a:bodyPr wrap="square" lIns="50800" tIns="50800" rIns="50800" bIns="50800" rtlCol="0" anchor="ctr"/>
           <a:lstStyle/>
           <a:p>
-            <a:pPr indent="0" marL="0">
+            <a:pPr marL="0" indent="0">
               <a:buNone/>
             </a:pPr>
             <a:r>
@@ -15514,7 +15246,7 @@
           <a:bodyPr wrap="square" lIns="50800" tIns="50800" rIns="50800" bIns="50800" rtlCol="0" anchor="ctr"/>
           <a:lstStyle/>
           <a:p>
-            <a:pPr indent="0" marL="0">
+            <a:pPr marL="0" indent="0">
               <a:buNone/>
             </a:pPr>
             <a:r>
@@ -15578,7 +15310,7 @@
           <a:bodyPr wrap="square" lIns="0" tIns="0" rIns="0" bIns="0" rtlCol="0" anchor="ctr"/>
           <a:lstStyle/>
           <a:p>
-            <a:pPr algn="ctr" indent="0" marL="0">
+            <a:pPr marL="0" indent="0" algn="ctr">
               <a:buNone/>
             </a:pPr>
             <a:r>
@@ -15617,7 +15349,7 @@
           <a:bodyPr wrap="square" lIns="50800" tIns="50800" rIns="50800" bIns="50800" rtlCol="0" anchor="ctr"/>
           <a:lstStyle/>
           <a:p>
-            <a:pPr indent="0" marL="0">
+            <a:pPr marL="0" indent="0">
               <a:buNone/>
             </a:pPr>
             <a:r>
@@ -15656,7 +15388,7 @@
           <a:bodyPr wrap="square" lIns="50800" tIns="50800" rIns="50800" bIns="50800" rtlCol="0" anchor="ctr"/>
           <a:lstStyle/>
           <a:p>
-            <a:pPr indent="0" marL="0">
+            <a:pPr marL="0" indent="0">
               <a:buNone/>
             </a:pPr>
             <a:r>
@@ -15698,7 +15430,7 @@
             <a:prstDash val="solid"/>
           </a:ln>
           <a:effectLst>
-            <a:outerShdw sx="100000" sy="100000" kx="0" ky="0" algn="bl" rotWithShape="0" blurRad="63500" dist="25400" dir="8100000">
+            <a:outerShdw blurRad="63500" dist="25400" dir="8100000" algn="bl" rotWithShape="0">
               <a:srgbClr val="000000">
                 <a:alpha val="10000"/>
               </a:srgbClr>
@@ -15752,7 +15484,7 @@
           <a:bodyPr wrap="square" lIns="0" tIns="0" rIns="0" bIns="0" rtlCol="0" anchor="ctr"/>
           <a:lstStyle/>
           <a:p>
-            <a:pPr indent="0" marL="0">
+            <a:pPr marL="0" indent="0">
               <a:buNone/>
             </a:pPr>
             <a:r>
@@ -15791,7 +15523,7 @@
           <a:bodyPr wrap="square" lIns="0" tIns="0" rIns="0" bIns="0" rtlCol="0" anchor="ctr"/>
           <a:lstStyle/>
           <a:p>
-            <a:pPr indent="0" marL="0">
+            <a:pPr marL="0" indent="0">
               <a:buNone/>
             </a:pPr>
             <a:r>
@@ -15855,7 +15587,7 @@
           <a:bodyPr wrap="square" lIns="0" tIns="0" rIns="0" bIns="0" rtlCol="0" anchor="ctr"/>
           <a:lstStyle/>
           <a:p>
-            <a:pPr algn="ctr" indent="0" marL="0">
+            <a:pPr marL="0" indent="0" algn="ctr">
               <a:buNone/>
             </a:pPr>
             <a:r>
@@ -15894,7 +15626,7 @@
           <a:bodyPr wrap="square" lIns="0" tIns="0" rIns="0" bIns="0" rtlCol="0" anchor="ctr"/>
           <a:lstStyle/>
           <a:p>
-            <a:pPr algn="ctr" indent="0" marL="0">
+            <a:pPr marL="0" indent="0" algn="ctr">
               <a:buNone/>
             </a:pPr>
             <a:r>
@@ -15933,7 +15665,7 @@
           <a:bodyPr wrap="square" lIns="101600" tIns="101600" rIns="101600" bIns="101600" rtlCol="0" anchor="ctr"/>
           <a:lstStyle/>
           <a:p>
-            <a:pPr indent="0" marL="0">
+            <a:pPr marL="0" indent="0">
               <a:buNone/>
             </a:pPr>
             <a:r>
@@ -15950,7 +15682,7 @@
             <a:endParaRPr lang="en-US" sz="1300" dirty="0"/>
           </a:p>
           <a:p>
-            <a:pPr indent="0" marL="0">
+            <a:pPr marL="0" indent="0">
               <a:buNone/>
             </a:pPr>
             <a:r>
@@ -16014,7 +15746,7 @@
           <a:bodyPr wrap="square" lIns="0" tIns="0" rIns="0" bIns="0" rtlCol="0" anchor="ctr"/>
           <a:lstStyle/>
           <a:p>
-            <a:pPr algn="ctr" indent="0" marL="0">
+            <a:pPr marL="0" indent="0" algn="ctr">
               <a:buNone/>
             </a:pPr>
             <a:r>
@@ -16048,6 +15780,7 @@
         <a:solidFill>
           <a:srgbClr val="E8F4F8"/>
         </a:solidFill>
+        <a:effectLst/>
       </p:bgPr>
     </p:bg>
     <p:spTree>
@@ -16135,7 +15868,7 @@
           <a:bodyPr wrap="square" lIns="0" tIns="0" rIns="0" bIns="0" rtlCol="0" anchor="ctr"/>
           <a:lstStyle/>
           <a:p>
-            <a:pPr indent="0" marL="0">
+            <a:pPr marL="0" indent="0">
               <a:buNone/>
             </a:pPr>
             <a:r>
@@ -16174,7 +15907,7 @@
           <a:bodyPr wrap="square" lIns="0" tIns="0" rIns="0" bIns="0" rtlCol="0" anchor="ctr"/>
           <a:lstStyle/>
           <a:p>
-            <a:pPr indent="0" marL="0">
+            <a:pPr marL="0" indent="0">
               <a:buNone/>
             </a:pPr>
             <a:r>
@@ -16238,7 +15971,7 @@
           <a:bodyPr wrap="square" lIns="0" tIns="0" rIns="0" bIns="0" rtlCol="0" anchor="ctr"/>
           <a:lstStyle/>
           <a:p>
-            <a:pPr indent="0" marL="0">
+            <a:pPr marL="0" indent="0">
               <a:buNone/>
             </a:pPr>
             <a:r>
@@ -16302,7 +16035,7 @@
           <a:bodyPr wrap="square" lIns="0" tIns="0" rIns="0" bIns="0" rtlCol="0" anchor="ctr"/>
           <a:lstStyle/>
           <a:p>
-            <a:pPr indent="0" marL="0">
+            <a:pPr marL="0" indent="0">
               <a:buNone/>
             </a:pPr>
             <a:r>
@@ -16366,7 +16099,7 @@
           <a:bodyPr wrap="square" lIns="0" tIns="0" rIns="0" bIns="0" rtlCol="0" anchor="ctr"/>
           <a:lstStyle/>
           <a:p>
-            <a:pPr indent="0" marL="0">
+            <a:pPr marL="0" indent="0">
               <a:buNone/>
             </a:pPr>
             <a:r>
@@ -16430,7 +16163,7 @@
           <a:bodyPr wrap="square" lIns="0" tIns="0" rIns="0" bIns="0" rtlCol="0" anchor="ctr"/>
           <a:lstStyle/>
           <a:p>
-            <a:pPr indent="0" marL="0">
+            <a:pPr marL="0" indent="0">
               <a:buNone/>
             </a:pPr>
             <a:r>
@@ -16494,7 +16227,7 @@
           <a:bodyPr wrap="square" lIns="0" tIns="0" rIns="0" bIns="0" rtlCol="0" anchor="ctr"/>
           <a:lstStyle/>
           <a:p>
-            <a:pPr indent="0" marL="0">
+            <a:pPr marL="0" indent="0">
               <a:buNone/>
             </a:pPr>
             <a:r>
@@ -16558,7 +16291,7 @@
           <a:bodyPr wrap="square" lIns="0" tIns="0" rIns="0" bIns="0" rtlCol="0" anchor="ctr"/>
           <a:lstStyle/>
           <a:p>
-            <a:pPr indent="0" marL="0">
+            <a:pPr marL="0" indent="0">
               <a:buNone/>
             </a:pPr>
             <a:r>
@@ -16622,7 +16355,7 @@
           <a:bodyPr wrap="square" lIns="0" tIns="0" rIns="0" bIns="0" rtlCol="0" anchor="ctr"/>
           <a:lstStyle/>
           <a:p>
-            <a:pPr indent="0" marL="0">
+            <a:pPr marL="0" indent="0">
               <a:buNone/>
             </a:pPr>
             <a:r>
@@ -16686,7 +16419,7 @@
           <a:bodyPr wrap="square" lIns="0" tIns="0" rIns="0" bIns="0" rtlCol="0" anchor="ctr"/>
           <a:lstStyle/>
           <a:p>
-            <a:pPr indent="0" marL="0">
+            <a:pPr marL="0" indent="0">
               <a:buNone/>
             </a:pPr>
             <a:r>
@@ -16750,7 +16483,7 @@
           <a:bodyPr wrap="square" lIns="0" tIns="0" rIns="0" bIns="0" rtlCol="0" anchor="ctr"/>
           <a:lstStyle/>
           <a:p>
-            <a:pPr indent="0" marL="0">
+            <a:pPr marL="0" indent="0">
               <a:buNone/>
             </a:pPr>
             <a:r>
@@ -16814,7 +16547,7 @@
           <a:bodyPr wrap="square" lIns="0" tIns="0" rIns="0" bIns="0" rtlCol="0" anchor="ctr"/>
           <a:lstStyle/>
           <a:p>
-            <a:pPr indent="0" marL="0">
+            <a:pPr marL="0" indent="0">
               <a:buNone/>
             </a:pPr>
             <a:r>
@@ -16878,7 +16611,7 @@
           <a:bodyPr wrap="square" lIns="0" tIns="0" rIns="0" bIns="0" rtlCol="0" anchor="ctr"/>
           <a:lstStyle/>
           <a:p>
-            <a:pPr indent="0" marL="0">
+            <a:pPr marL="0" indent="0">
               <a:buNone/>
             </a:pPr>
             <a:r>
@@ -16942,7 +16675,7 @@
           <a:bodyPr wrap="square" lIns="0" tIns="0" rIns="0" bIns="0" rtlCol="0" anchor="ctr"/>
           <a:lstStyle/>
           <a:p>
-            <a:pPr indent="0" marL="0">
+            <a:pPr marL="0" indent="0">
               <a:buNone/>
             </a:pPr>
             <a:r>
@@ -17006,7 +16739,7 @@
           <a:bodyPr wrap="square" lIns="0" tIns="0" rIns="0" bIns="0" rtlCol="0" anchor="ctr"/>
           <a:lstStyle/>
           <a:p>
-            <a:pPr indent="0" marL="0">
+            <a:pPr marL="0" indent="0">
               <a:buNone/>
             </a:pPr>
             <a:r>
@@ -17070,7 +16803,7 @@
           <a:bodyPr wrap="square" lIns="0" tIns="0" rIns="0" bIns="0" rtlCol="0" anchor="ctr"/>
           <a:lstStyle/>
           <a:p>
-            <a:pPr indent="0" marL="0">
+            <a:pPr marL="0" indent="0">
               <a:buNone/>
             </a:pPr>
             <a:r>
@@ -17134,7 +16867,7 @@
           <a:bodyPr wrap="square" lIns="0" tIns="0" rIns="0" bIns="0" rtlCol="0" anchor="ctr"/>
           <a:lstStyle/>
           <a:p>
-            <a:pPr indent="0" marL="0">
+            <a:pPr marL="0" indent="0">
               <a:buNone/>
             </a:pPr>
             <a:r>
@@ -17198,7 +16931,7 @@
           <a:bodyPr wrap="square" lIns="0" tIns="0" rIns="0" bIns="0" rtlCol="0" anchor="ctr"/>
           <a:lstStyle/>
           <a:p>
-            <a:pPr indent="0" marL="0">
+            <a:pPr marL="0" indent="0">
               <a:buNone/>
             </a:pPr>
             <a:r>
@@ -17262,7 +16995,7 @@
           <a:bodyPr wrap="square" lIns="0" tIns="0" rIns="0" bIns="0" rtlCol="0" anchor="ctr"/>
           <a:lstStyle/>
           <a:p>
-            <a:pPr indent="0" marL="0">
+            <a:pPr marL="0" indent="0">
               <a:buNone/>
             </a:pPr>
             <a:r>
@@ -17326,7 +17059,7 @@
           <a:bodyPr wrap="square" lIns="0" tIns="0" rIns="0" bIns="0" rtlCol="0" anchor="ctr"/>
           <a:lstStyle/>
           <a:p>
-            <a:pPr indent="0" marL="0">
+            <a:pPr marL="0" indent="0">
               <a:buNone/>
             </a:pPr>
             <a:r>
@@ -17390,7 +17123,7 @@
           <a:bodyPr wrap="square" lIns="0" tIns="0" rIns="0" bIns="0" rtlCol="0" anchor="ctr"/>
           <a:lstStyle/>
           <a:p>
-            <a:pPr indent="0" marL="0">
+            <a:pPr marL="0" indent="0">
               <a:buNone/>
             </a:pPr>
             <a:r>
@@ -17454,7 +17187,7 @@
           <a:bodyPr wrap="square" lIns="0" tIns="0" rIns="0" bIns="0" rtlCol="0" anchor="ctr"/>
           <a:lstStyle/>
           <a:p>
-            <a:pPr indent="0" marL="0">
+            <a:pPr marL="0" indent="0">
               <a:buNone/>
             </a:pPr>
             <a:r>
@@ -17518,7 +17251,7 @@
           <a:bodyPr wrap="square" lIns="0" tIns="0" rIns="0" bIns="0" rtlCol="0" anchor="ctr"/>
           <a:lstStyle/>
           <a:p>
-            <a:pPr indent="0" marL="0">
+            <a:pPr marL="0" indent="0">
               <a:buNone/>
             </a:pPr>
             <a:r>
@@ -17582,7 +17315,7 @@
           <a:bodyPr wrap="square" lIns="0" tIns="0" rIns="0" bIns="0" rtlCol="0" anchor="ctr"/>
           <a:lstStyle/>
           <a:p>
-            <a:pPr indent="0" marL="0">
+            <a:pPr marL="0" indent="0">
               <a:buNone/>
             </a:pPr>
             <a:r>
@@ -17646,7 +17379,7 @@
           <a:bodyPr wrap="square" lIns="0" tIns="0" rIns="0" bIns="0" rtlCol="0" anchor="ctr"/>
           <a:lstStyle/>
           <a:p>
-            <a:pPr indent="0" marL="0">
+            <a:pPr marL="0" indent="0">
               <a:buNone/>
             </a:pPr>
             <a:r>
@@ -17710,7 +17443,7 @@
           <a:bodyPr wrap="square" lIns="0" tIns="0" rIns="0" bIns="0" rtlCol="0" anchor="ctr"/>
           <a:lstStyle/>
           <a:p>
-            <a:pPr indent="0" marL="0">
+            <a:pPr marL="0" indent="0">
               <a:buNone/>
             </a:pPr>
             <a:r>
@@ -17774,7 +17507,7 @@
           <a:bodyPr wrap="square" lIns="0" tIns="0" rIns="0" bIns="0" rtlCol="0" anchor="ctr"/>
           <a:lstStyle/>
           <a:p>
-            <a:pPr indent="0" marL="0">
+            <a:pPr marL="0" indent="0">
               <a:buNone/>
             </a:pPr>
             <a:r>
@@ -17838,7 +17571,7 @@
           <a:bodyPr wrap="square" lIns="0" tIns="0" rIns="0" bIns="0" rtlCol="0" anchor="ctr"/>
           <a:lstStyle/>
           <a:p>
-            <a:pPr indent="0" marL="0">
+            <a:pPr marL="0" indent="0">
               <a:buNone/>
             </a:pPr>
             <a:r>
@@ -17902,7 +17635,7 @@
           <a:bodyPr wrap="square" lIns="0" tIns="0" rIns="0" bIns="0" rtlCol="0" anchor="ctr"/>
           <a:lstStyle/>
           <a:p>
-            <a:pPr indent="0" marL="0">
+            <a:pPr marL="0" indent="0">
               <a:buNone/>
             </a:pPr>
             <a:r>
@@ -17966,7 +17699,7 @@
           <a:bodyPr wrap="square" lIns="0" tIns="0" rIns="0" bIns="0" rtlCol="0" anchor="ctr"/>
           <a:lstStyle/>
           <a:p>
-            <a:pPr indent="0" marL="0">
+            <a:pPr marL="0" indent="0">
               <a:buNone/>
             </a:pPr>
             <a:r>
@@ -18030,7 +17763,7 @@
           <a:bodyPr wrap="square" lIns="0" tIns="0" rIns="0" bIns="0" rtlCol="0" anchor="ctr"/>
           <a:lstStyle/>
           <a:p>
-            <a:pPr indent="0" marL="0">
+            <a:pPr marL="0" indent="0">
               <a:buNone/>
             </a:pPr>
             <a:r>
@@ -18094,7 +17827,7 @@
           <a:bodyPr wrap="square" lIns="0" tIns="0" rIns="0" bIns="0" rtlCol="0" anchor="ctr"/>
           <a:lstStyle/>
           <a:p>
-            <a:pPr indent="0" marL="0">
+            <a:pPr marL="0" indent="0">
               <a:buNone/>
             </a:pPr>
             <a:r>
@@ -18153,6 +17886,7 @@
         <a:solidFill>
           <a:srgbClr val="E8F4F8"/>
         </a:solidFill>
+        <a:effectLst/>
       </p:bgPr>
     </p:bg>
     <p:spTree>
@@ -18240,7 +17974,7 @@
           <a:bodyPr wrap="square" lIns="0" tIns="0" rIns="0" bIns="0" rtlCol="0" anchor="ctr"/>
           <a:lstStyle/>
           <a:p>
-            <a:pPr indent="0" marL="0">
+            <a:pPr marL="0" indent="0">
               <a:buNone/>
             </a:pPr>
             <a:r>
@@ -18279,7 +18013,7 @@
           <a:bodyPr wrap="square" lIns="0" tIns="0" rIns="0" bIns="0" rtlCol="0" anchor="ctr"/>
           <a:lstStyle/>
           <a:p>
-            <a:pPr indent="0" marL="0">
+            <a:pPr marL="0" indent="0">
               <a:buNone/>
             </a:pPr>
             <a:r>
@@ -18321,7 +18055,7 @@
             <a:prstDash val="solid"/>
           </a:ln>
           <a:effectLst>
-            <a:outerShdw sx="100000" sy="100000" kx="0" ky="0" algn="bl" rotWithShape="0" blurRad="50800" dist="25400" dir="8100000">
+            <a:outerShdw blurRad="50800" dist="25400" dir="8100000" algn="bl" rotWithShape="0">
               <a:srgbClr val="000000">
                 <a:alpha val="10000"/>
               </a:srgbClr>
@@ -18375,7 +18109,7 @@
           <a:bodyPr wrap="square" lIns="0" tIns="0" rIns="0" bIns="0" rtlCol="0" anchor="ctr"/>
           <a:lstStyle/>
           <a:p>
-            <a:pPr indent="0" marL="0">
+            <a:pPr marL="0" indent="0">
               <a:buNone/>
             </a:pPr>
             <a:r>
@@ -18414,7 +18148,7 @@
           <a:bodyPr wrap="square" lIns="0" tIns="0" rIns="0" bIns="0" rtlCol="0" anchor="ctr"/>
           <a:lstStyle/>
           <a:p>
-            <a:pPr indent="0" marL="0">
+            <a:pPr marL="0" indent="0">
               <a:buNone/>
             </a:pPr>
             <a:r>
@@ -18453,7 +18187,7 @@
           <a:bodyPr wrap="square" lIns="0" tIns="0" rIns="0" bIns="0" rtlCol="0" anchor="ctr"/>
           <a:lstStyle/>
           <a:p>
-            <a:pPr indent="0" marL="0">
+            <a:pPr marL="0" indent="0">
               <a:buNone/>
             </a:pPr>
             <a:r>
@@ -18492,7 +18226,7 @@
           <a:bodyPr wrap="square" lIns="0" tIns="0" rIns="0" bIns="0" rtlCol="0" anchor="ctr"/>
           <a:lstStyle/>
           <a:p>
-            <a:pPr indent="0" marL="0">
+            <a:pPr marL="0" indent="0">
               <a:buNone/>
             </a:pPr>
             <a:r>
@@ -18556,7 +18290,7 @@
           <a:bodyPr wrap="square" lIns="0" tIns="0" rIns="0" bIns="0" rtlCol="0" anchor="ctr"/>
           <a:lstStyle/>
           <a:p>
-            <a:pPr algn="ctr" indent="0" marL="0">
+            <a:pPr marL="0" indent="0" algn="ctr">
               <a:buNone/>
             </a:pPr>
             <a:r>
@@ -18595,7 +18329,7 @@
           <a:bodyPr wrap="square" lIns="0" tIns="0" rIns="0" bIns="0" rtlCol="0" anchor="ctr"/>
           <a:lstStyle/>
           <a:p>
-            <a:pPr indent="0" marL="0">
+            <a:pPr marL="0" indent="0">
               <a:buNone/>
             </a:pPr>
             <a:r>
@@ -18637,7 +18371,7 @@
             <a:prstDash val="solid"/>
           </a:ln>
           <a:effectLst>
-            <a:outerShdw sx="100000" sy="100000" kx="0" ky="0" algn="bl" rotWithShape="0" blurRad="50800" dist="25400" dir="8100000">
+            <a:outerShdw blurRad="50800" dist="25400" dir="8100000" algn="bl" rotWithShape="0">
               <a:srgbClr val="000000">
                 <a:alpha val="10000"/>
               </a:srgbClr>
@@ -18691,7 +18425,7 @@
           <a:bodyPr wrap="square" lIns="0" tIns="0" rIns="0" bIns="0" rtlCol="0" anchor="ctr"/>
           <a:lstStyle/>
           <a:p>
-            <a:pPr indent="0" marL="0">
+            <a:pPr marL="0" indent="0">
               <a:buNone/>
             </a:pPr>
             <a:r>
@@ -18730,7 +18464,7 @@
           <a:bodyPr wrap="square" lIns="0" tIns="0" rIns="0" bIns="0" rtlCol="0" anchor="ctr"/>
           <a:lstStyle/>
           <a:p>
-            <a:pPr indent="0" marL="0">
+            <a:pPr marL="0" indent="0">
               <a:buNone/>
             </a:pPr>
             <a:r>
@@ -18769,7 +18503,7 @@
           <a:bodyPr wrap="square" lIns="0" tIns="0" rIns="0" bIns="0" rtlCol="0" anchor="ctr"/>
           <a:lstStyle/>
           <a:p>
-            <a:pPr indent="0" marL="0">
+            <a:pPr marL="0" indent="0">
               <a:buNone/>
             </a:pPr>
             <a:r>
@@ -18808,7 +18542,7 @@
           <a:bodyPr wrap="square" lIns="0" tIns="0" rIns="0" bIns="0" rtlCol="0" anchor="ctr"/>
           <a:lstStyle/>
           <a:p>
-            <a:pPr indent="0" marL="0">
+            <a:pPr marL="0" indent="0">
               <a:buNone/>
             </a:pPr>
             <a:r>
@@ -18847,7 +18581,7 @@
           <a:bodyPr wrap="square" lIns="0" tIns="0" rIns="0" bIns="0" rtlCol="0" anchor="ctr"/>
           <a:lstStyle/>
           <a:p>
-            <a:pPr indent="0" marL="0">
+            <a:pPr marL="0" indent="0">
               <a:buNone/>
             </a:pPr>
             <a:r>
@@ -18911,7 +18645,7 @@
           <a:bodyPr wrap="square" lIns="0" tIns="0" rIns="0" bIns="0" rtlCol="0" anchor="ctr"/>
           <a:lstStyle/>
           <a:p>
-            <a:pPr algn="ctr" indent="0" marL="0">
+            <a:pPr marL="0" indent="0" algn="ctr">
               <a:buNone/>
             </a:pPr>
             <a:r>
@@ -18950,7 +18684,7 @@
           <a:bodyPr wrap="square" lIns="0" tIns="0" rIns="0" bIns="0" rtlCol="0" anchor="ctr"/>
           <a:lstStyle/>
           <a:p>
-            <a:pPr indent="0" marL="0">
+            <a:pPr marL="0" indent="0">
               <a:buNone/>
             </a:pPr>
             <a:r>
@@ -18992,7 +18726,7 @@
             <a:prstDash val="solid"/>
           </a:ln>
           <a:effectLst>
-            <a:outerShdw sx="100000" sy="100000" kx="0" ky="0" algn="bl" rotWithShape="0" blurRad="50800" dist="25400" dir="8100000">
+            <a:outerShdw blurRad="50800" dist="25400" dir="8100000" algn="bl" rotWithShape="0">
               <a:srgbClr val="000000">
                 <a:alpha val="10000"/>
               </a:srgbClr>
@@ -19046,7 +18780,7 @@
           <a:bodyPr wrap="square" lIns="0" tIns="0" rIns="0" bIns="0" rtlCol="0" anchor="ctr"/>
           <a:lstStyle/>
           <a:p>
-            <a:pPr indent="0" marL="0">
+            <a:pPr marL="0" indent="0">
               <a:buNone/>
             </a:pPr>
             <a:r>
@@ -19085,7 +18819,7 @@
           <a:bodyPr wrap="square" lIns="0" tIns="0" rIns="0" bIns="0" rtlCol="0" anchor="ctr"/>
           <a:lstStyle/>
           <a:p>
-            <a:pPr indent="0" marL="0">
+            <a:pPr marL="0" indent="0">
               <a:buNone/>
             </a:pPr>
             <a:r>
@@ -19124,7 +18858,7 @@
           <a:bodyPr wrap="square" lIns="0" tIns="0" rIns="0" bIns="0" rtlCol="0" anchor="ctr"/>
           <a:lstStyle/>
           <a:p>
-            <a:pPr indent="0" marL="0">
+            <a:pPr marL="0" indent="0">
               <a:buNone/>
             </a:pPr>
             <a:r>
@@ -19163,7 +18897,7 @@
           <a:bodyPr wrap="square" lIns="0" tIns="0" rIns="0" bIns="0" rtlCol="0" anchor="ctr"/>
           <a:lstStyle/>
           <a:p>
-            <a:pPr indent="0" marL="0">
+            <a:pPr marL="0" indent="0">
               <a:buNone/>
             </a:pPr>
             <a:r>
@@ -19227,7 +18961,7 @@
           <a:bodyPr wrap="square" lIns="0" tIns="0" rIns="0" bIns="0" rtlCol="0" anchor="ctr"/>
           <a:lstStyle/>
           <a:p>
-            <a:pPr algn="ctr" indent="0" marL="0">
+            <a:pPr marL="0" indent="0" algn="ctr">
               <a:buNone/>
             </a:pPr>
             <a:r>
@@ -19266,7 +19000,7 @@
           <a:bodyPr wrap="square" lIns="0" tIns="0" rIns="0" bIns="0" rtlCol="0" anchor="ctr"/>
           <a:lstStyle/>
           <a:p>
-            <a:pPr indent="0" marL="0">
+            <a:pPr marL="0" indent="0">
               <a:buNone/>
             </a:pPr>
             <a:r>
@@ -19300,6 +19034,7 @@
         <a:solidFill>
           <a:srgbClr val="1E2D3D"/>
         </a:solidFill>
+        <a:effectLst/>
       </p:bgPr>
     </p:bg>
     <p:spTree>
@@ -19387,7 +19122,7 @@
           <a:bodyPr wrap="square" lIns="0" tIns="0" rIns="0" bIns="0" rtlCol="0" anchor="ctr"/>
           <a:lstStyle/>
           <a:p>
-            <a:pPr indent="0" marL="0">
+            <a:pPr marL="0" indent="0">
               <a:buNone/>
             </a:pPr>
             <a:r>
@@ -19426,7 +19161,7 @@
           <a:bodyPr wrap="square" lIns="0" tIns="0" rIns="0" bIns="0" rtlCol="0" anchor="ctr"/>
           <a:lstStyle/>
           <a:p>
-            <a:pPr indent="0" marL="0">
+            <a:pPr marL="0" indent="0">
               <a:buNone/>
             </a:pPr>
             <a:r>
@@ -19465,7 +19200,7 @@
           <a:bodyPr wrap="square" lIns="0" tIns="0" rIns="0" bIns="0" rtlCol="0" anchor="ctr"/>
           <a:lstStyle/>
           <a:p>
-            <a:pPr indent="0" marL="0">
+            <a:pPr marL="0" indent="0">
               <a:buNone/>
             </a:pPr>
             <a:r>
@@ -19504,7 +19239,7 @@
           <a:bodyPr wrap="square" lIns="0" tIns="0" rIns="0" bIns="0" rtlCol="0" anchor="ctr"/>
           <a:lstStyle/>
           <a:p>
-            <a:pPr indent="0" marL="0">
+            <a:pPr marL="0" indent="0">
               <a:buNone/>
             </a:pPr>
             <a:r>
@@ -19543,7 +19278,7 @@
           <a:bodyPr wrap="square" lIns="0" tIns="0" rIns="0" bIns="0" rtlCol="0" anchor="ctr"/>
           <a:lstStyle/>
           <a:p>
-            <a:pPr indent="0" marL="0">
+            <a:pPr marL="0" indent="0">
               <a:buNone/>
             </a:pPr>
             <a:r>
@@ -19582,7 +19317,7 @@
           <a:bodyPr wrap="square" lIns="0" tIns="0" rIns="0" bIns="0" rtlCol="0" anchor="ctr"/>
           <a:lstStyle/>
           <a:p>
-            <a:pPr indent="0" marL="0">
+            <a:pPr marL="0" indent="0">
               <a:buNone/>
             </a:pPr>
             <a:r>
@@ -19621,7 +19356,7 @@
           <a:bodyPr wrap="square" lIns="0" tIns="0" rIns="0" bIns="0" rtlCol="0" anchor="ctr"/>
           <a:lstStyle/>
           <a:p>
-            <a:pPr indent="0" marL="0">
+            <a:pPr marL="0" indent="0">
               <a:buNone/>
             </a:pPr>
             <a:r>
@@ -19660,7 +19395,7 @@
           <a:bodyPr wrap="square" lIns="0" tIns="0" rIns="0" bIns="0" rtlCol="0" anchor="ctr"/>
           <a:lstStyle/>
           <a:p>
-            <a:pPr indent="0" marL="0">
+            <a:pPr marL="0" indent="0">
               <a:buNone/>
             </a:pPr>
             <a:r>
@@ -19699,7 +19434,7 @@
           <a:bodyPr wrap="square" lIns="0" tIns="0" rIns="0" bIns="0" rtlCol="0" anchor="ctr"/>
           <a:lstStyle/>
           <a:p>
-            <a:pPr indent="0" marL="0">
+            <a:pPr marL="0" indent="0">
               <a:buNone/>
             </a:pPr>
             <a:r>
@@ -19738,7 +19473,7 @@
           <a:bodyPr wrap="square" lIns="0" tIns="0" rIns="0" bIns="0" rtlCol="0" anchor="ctr"/>
           <a:lstStyle/>
           <a:p>
-            <a:pPr indent="0" marL="0">
+            <a:pPr marL="0" indent="0">
               <a:buNone/>
             </a:pPr>
             <a:r>
@@ -19777,7 +19512,7 @@
           <a:bodyPr wrap="square" lIns="0" tIns="0" rIns="0" bIns="0" rtlCol="0" anchor="ctr"/>
           <a:lstStyle/>
           <a:p>
-            <a:pPr indent="0" marL="0">
+            <a:pPr marL="0" indent="0">
               <a:buNone/>
             </a:pPr>
             <a:r>
@@ -19816,7 +19551,7 @@
           <a:bodyPr wrap="square" lIns="0" tIns="0" rIns="0" bIns="0" rtlCol="0" anchor="ctr"/>
           <a:lstStyle/>
           <a:p>
-            <a:pPr indent="0" marL="0">
+            <a:pPr marL="0" indent="0">
               <a:buNone/>
             </a:pPr>
             <a:r>
@@ -19855,7 +19590,7 @@
           <a:bodyPr wrap="square" lIns="0" tIns="0" rIns="0" bIns="0" rtlCol="0" anchor="ctr"/>
           <a:lstStyle/>
           <a:p>
-            <a:pPr indent="0" marL="0">
+            <a:pPr marL="0" indent="0">
               <a:buNone/>
             </a:pPr>
             <a:r>
@@ -19894,7 +19629,7 @@
           <a:bodyPr wrap="square" lIns="0" tIns="0" rIns="0" bIns="0" rtlCol="0" anchor="ctr"/>
           <a:lstStyle/>
           <a:p>
-            <a:pPr indent="0" marL="0">
+            <a:pPr marL="0" indent="0">
               <a:buNone/>
             </a:pPr>
             <a:r>
@@ -19958,7 +19693,7 @@
           <a:bodyPr wrap="square" lIns="0" tIns="0" rIns="0" bIns="0" rtlCol="0" anchor="ctr"/>
           <a:lstStyle/>
           <a:p>
-            <a:pPr indent="0" marL="0">
+            <a:pPr marL="0" indent="0">
               <a:buNone/>
             </a:pPr>
             <a:r>
@@ -19997,7 +19732,7 @@
           <a:bodyPr wrap="square" lIns="0" tIns="0" rIns="0" bIns="0" rtlCol="0" anchor="ctr"/>
           <a:lstStyle/>
           <a:p>
-            <a:pPr indent="0" marL="0">
+            <a:pPr marL="0" indent="0">
               <a:buNone/>
             </a:pPr>
             <a:r>
@@ -20036,7 +19771,7 @@
           <a:bodyPr wrap="square" lIns="0" tIns="0" rIns="0" bIns="0" rtlCol="0" anchor="ctr"/>
           <a:lstStyle/>
           <a:p>
-            <a:pPr indent="0" marL="0">
+            <a:pPr marL="0" indent="0">
               <a:buNone/>
             </a:pPr>
             <a:r>
@@ -20100,7 +19835,7 @@
           <a:bodyPr wrap="square" lIns="0" tIns="0" rIns="0" bIns="0" rtlCol="0" anchor="ctr"/>
           <a:lstStyle/>
           <a:p>
-            <a:pPr indent="0" marL="0">
+            <a:pPr marL="0" indent="0">
               <a:buNone/>
             </a:pPr>
             <a:r>
@@ -20139,7 +19874,7 @@
           <a:bodyPr wrap="square" lIns="0" tIns="0" rIns="0" bIns="0" rtlCol="0" anchor="ctr"/>
           <a:lstStyle/>
           <a:p>
-            <a:pPr indent="0" marL="0">
+            <a:pPr marL="0" indent="0">
               <a:buNone/>
             </a:pPr>
             <a:r>
@@ -20178,7 +19913,7 @@
           <a:bodyPr wrap="square" lIns="0" tIns="0" rIns="0" bIns="0" rtlCol="0" anchor="ctr"/>
           <a:lstStyle/>
           <a:p>
-            <a:pPr indent="0" marL="0">
+            <a:pPr marL="0" indent="0">
               <a:buNone/>
             </a:pPr>
             <a:r>
@@ -20217,7 +19952,7 @@
           <a:bodyPr wrap="square" lIns="0" tIns="0" rIns="0" bIns="0" rtlCol="0" anchor="ctr"/>
           <a:lstStyle/>
           <a:p>
-            <a:pPr indent="0" marL="0">
+            <a:pPr marL="0" indent="0">
               <a:buNone/>
             </a:pPr>
             <a:r>
@@ -20256,7 +19991,7 @@
           <a:bodyPr wrap="square" lIns="0" tIns="0" rIns="0" bIns="0" rtlCol="0" anchor="ctr"/>
           <a:lstStyle/>
           <a:p>
-            <a:pPr indent="0" marL="0">
+            <a:pPr marL="0" indent="0">
               <a:buNone/>
             </a:pPr>
             <a:r>
@@ -20320,7 +20055,7 @@
           <a:bodyPr wrap="square" lIns="0" tIns="0" rIns="0" bIns="0" rtlCol="0" anchor="ctr"/>
           <a:lstStyle/>
           <a:p>
-            <a:pPr algn="ctr" indent="0" marL="0">
+            <a:pPr marL="0" indent="0" algn="ctr">
               <a:buNone/>
             </a:pPr>
             <a:r>
@@ -20359,7 +20094,7 @@
           <a:bodyPr wrap="square" lIns="0" tIns="0" rIns="0" bIns="0" rtlCol="0" anchor="ctr"/>
           <a:lstStyle/>
           <a:p>
-            <a:pPr algn="ctr" indent="0" marL="0">
+            <a:pPr marL="0" indent="0" algn="ctr">
               <a:buNone/>
             </a:pPr>
             <a:r>
@@ -20393,6 +20128,7 @@
         <a:solidFill>
           <a:srgbClr val="E8F4F8"/>
         </a:solidFill>
+        <a:effectLst/>
       </p:bgPr>
     </p:bg>
     <p:spTree>
@@ -20480,7 +20216,7 @@
           <a:bodyPr wrap="square" lIns="0" tIns="0" rIns="0" bIns="0" rtlCol="0" anchor="ctr"/>
           <a:lstStyle/>
           <a:p>
-            <a:pPr indent="0" marL="0">
+            <a:pPr marL="0" indent="0">
               <a:buNone/>
             </a:pPr>
             <a:r>
@@ -20519,7 +20255,7 @@
           <a:bodyPr wrap="square" lIns="0" tIns="0" rIns="0" bIns="0" rtlCol="0" anchor="ctr"/>
           <a:lstStyle/>
           <a:p>
-            <a:pPr indent="0" marL="0">
+            <a:pPr marL="0" indent="0">
               <a:buNone/>
             </a:pPr>
             <a:r>
@@ -20583,7 +20319,7 @@
           <a:bodyPr wrap="square" lIns="0" tIns="0" rIns="0" bIns="0" rtlCol="0" anchor="ctr"/>
           <a:lstStyle/>
           <a:p>
-            <a:pPr algn="ctr" indent="0" marL="0">
+            <a:pPr marL="0" indent="0" algn="ctr">
               <a:buNone/>
             </a:pPr>
             <a:r>
@@ -20647,7 +20383,7 @@
           <a:bodyPr wrap="square" lIns="0" tIns="0" rIns="0" bIns="0" rtlCol="0" anchor="ctr"/>
           <a:lstStyle/>
           <a:p>
-            <a:pPr algn="ctr" indent="0" marL="0">
+            <a:pPr marL="0" indent="0" algn="ctr">
               <a:buNone/>
             </a:pPr>
             <a:r>
@@ -20711,7 +20447,7 @@
           <a:bodyPr wrap="square" lIns="0" tIns="0" rIns="0" bIns="0" rtlCol="0" anchor="ctr"/>
           <a:lstStyle/>
           <a:p>
-            <a:pPr algn="ctr" indent="0" marL="0">
+            <a:pPr marL="0" indent="0" algn="ctr">
               <a:buNone/>
             </a:pPr>
             <a:r>
@@ -20775,7 +20511,7 @@
           <a:bodyPr wrap="square" lIns="0" tIns="0" rIns="0" bIns="0" rtlCol="0" anchor="ctr"/>
           <a:lstStyle/>
           <a:p>
-            <a:pPr algn="ctr" indent="0" marL="0">
+            <a:pPr marL="0" indent="0" algn="ctr">
               <a:buNone/>
             </a:pPr>
             <a:r>
@@ -20839,7 +20575,7 @@
           <a:bodyPr wrap="square" lIns="0" tIns="0" rIns="0" bIns="0" rtlCol="0" anchor="ctr"/>
           <a:lstStyle/>
           <a:p>
-            <a:pPr algn="ctr" indent="0" marL="0">
+            <a:pPr marL="0" indent="0" algn="ctr">
               <a:buNone/>
             </a:pPr>
             <a:r>
@@ -20903,7 +20639,7 @@
           <a:bodyPr wrap="square" lIns="0" tIns="0" rIns="0" bIns="0" rtlCol="0" anchor="ctr"/>
           <a:lstStyle/>
           <a:p>
-            <a:pPr algn="ctr" indent="0" marL="0">
+            <a:pPr marL="0" indent="0" algn="ctr">
               <a:buNone/>
             </a:pPr>
             <a:r>
@@ -20967,7 +20703,7 @@
           <a:bodyPr wrap="square" lIns="0" tIns="0" rIns="0" bIns="0" rtlCol="0" anchor="ctr"/>
           <a:lstStyle/>
           <a:p>
-            <a:pPr algn="ctr" indent="0" marL="0">
+            <a:pPr marL="0" indent="0" algn="ctr">
               <a:buNone/>
             </a:pPr>
             <a:r>
@@ -21031,7 +20767,7 @@
           <a:bodyPr wrap="square" lIns="0" tIns="0" rIns="0" bIns="0" rtlCol="0" anchor="ctr"/>
           <a:lstStyle/>
           <a:p>
-            <a:pPr algn="ctr" indent="0" marL="0">
+            <a:pPr marL="0" indent="0" algn="ctr">
               <a:buNone/>
             </a:pPr>
             <a:r>
@@ -21081,7 +20817,7 @@
         <p:spPr>
           <a:xfrm>
             <a:off x="1234440" y="2926080"/>
-            <a:ext cx="804672" cy="-1188720"/>
+            <a:ext cx="804672" cy="0"/>
           </a:xfrm>
           <a:prstGeom prst="line">
             <a:avLst/>
@@ -21150,7 +20886,7 @@
         <p:spPr>
           <a:xfrm>
             <a:off x="2542032" y="3291840"/>
-            <a:ext cx="1938528" cy="-822960"/>
+            <a:ext cx="1938528" cy="0"/>
           </a:xfrm>
           <a:prstGeom prst="line">
             <a:avLst/>
@@ -21211,7 +20947,7 @@
             <a:prstDash val="solid"/>
           </a:ln>
           <a:effectLst>
-            <a:outerShdw sx="100000" sy="100000" kx="0" ky="0" algn="bl" rotWithShape="0" blurRad="63500" dist="25400" dir="8100000">
+            <a:outerShdw blurRad="63500" dist="25400" dir="8100000" algn="bl" rotWithShape="0">
               <a:srgbClr val="000000">
                 <a:alpha val="10000"/>
               </a:srgbClr>
@@ -21265,7 +21001,7 @@
           <a:bodyPr wrap="square" lIns="0" tIns="0" rIns="0" bIns="0" rtlCol="0" anchor="ctr"/>
           <a:lstStyle/>
           <a:p>
-            <a:pPr indent="0" marL="0">
+            <a:pPr marL="0" indent="0">
               <a:buNone/>
             </a:pPr>
             <a:r>
@@ -21329,7 +21065,7 @@
           <a:bodyPr wrap="square" lIns="0" tIns="0" rIns="0" bIns="0" rtlCol="0" anchor="ctr"/>
           <a:lstStyle/>
           <a:p>
-            <a:pPr algn="ctr" indent="0" marL="0">
+            <a:pPr marL="0" indent="0" algn="ctr">
               <a:buNone/>
             </a:pPr>
             <a:r>
@@ -21393,7 +21129,7 @@
           <a:bodyPr wrap="square" lIns="0" tIns="0" rIns="0" bIns="0" rtlCol="0" anchor="ctr"/>
           <a:lstStyle/>
           <a:p>
-            <a:pPr algn="ctr" indent="0" marL="0">
+            <a:pPr marL="0" indent="0" algn="ctr">
               <a:buNone/>
             </a:pPr>
             <a:r>
@@ -21457,7 +21193,7 @@
           <a:bodyPr wrap="square" lIns="0" tIns="0" rIns="0" bIns="0" rtlCol="0" anchor="ctr"/>
           <a:lstStyle/>
           <a:p>
-            <a:pPr algn="ctr" indent="0" marL="0">
+            <a:pPr marL="0" indent="0" algn="ctr">
               <a:buNone/>
             </a:pPr>
             <a:r>
@@ -21521,7 +21257,7 @@
           <a:bodyPr wrap="square" lIns="0" tIns="0" rIns="0" bIns="0" rtlCol="0" anchor="ctr"/>
           <a:lstStyle/>
           <a:p>
-            <a:pPr indent="0" marL="0">
+            <a:pPr marL="0" indent="0">
               <a:buNone/>
             </a:pPr>
             <a:r>
@@ -21585,7 +21321,7 @@
           <a:bodyPr wrap="square" lIns="0" tIns="0" rIns="0" bIns="0" rtlCol="0" anchor="ctr"/>
           <a:lstStyle/>
           <a:p>
-            <a:pPr indent="0" marL="0">
+            <a:pPr marL="0" indent="0">
               <a:buNone/>
             </a:pPr>
             <a:r>
@@ -21649,7 +21385,7 @@
           <a:bodyPr wrap="square" lIns="0" tIns="0" rIns="0" bIns="0" rtlCol="0" anchor="ctr"/>
           <a:lstStyle/>
           <a:p>
-            <a:pPr indent="0" marL="0">
+            <a:pPr marL="0" indent="0">
               <a:buNone/>
             </a:pPr>
             <a:r>
@@ -21713,7 +21449,7 @@
           <a:bodyPr wrap="square" lIns="0" tIns="0" rIns="0" bIns="0" rtlCol="0" anchor="ctr"/>
           <a:lstStyle/>
           <a:p>
-            <a:pPr indent="0" marL="0">
+            <a:pPr marL="0" indent="0">
               <a:buNone/>
             </a:pPr>
             <a:r>
@@ -21777,7 +21513,7 @@
           <a:bodyPr wrap="square" lIns="0" tIns="0" rIns="0" bIns="0" rtlCol="0" anchor="ctr"/>
           <a:lstStyle/>
           <a:p>
-            <a:pPr indent="0" marL="0">
+            <a:pPr marL="0" indent="0">
               <a:buNone/>
             </a:pPr>
             <a:r>
@@ -21841,7 +21577,7 @@
           <a:bodyPr wrap="square" lIns="0" tIns="0" rIns="0" bIns="0" rtlCol="0" anchor="ctr"/>
           <a:lstStyle/>
           <a:p>
-            <a:pPr indent="0" marL="0">
+            <a:pPr marL="0" indent="0">
               <a:buNone/>
             </a:pPr>
             <a:r>
@@ -21905,7 +21641,7 @@
           <a:bodyPr wrap="square" lIns="0" tIns="0" rIns="0" bIns="0" rtlCol="0" anchor="ctr"/>
           <a:lstStyle/>
           <a:p>
-            <a:pPr indent="0" marL="0">
+            <a:pPr marL="0" indent="0">
               <a:buNone/>
             </a:pPr>
             <a:r>
@@ -21969,7 +21705,7 @@
           <a:bodyPr wrap="square" lIns="0" tIns="0" rIns="0" bIns="0" rtlCol="0" anchor="ctr"/>
           <a:lstStyle/>
           <a:p>
-            <a:pPr indent="0" marL="0">
+            <a:pPr marL="0" indent="0">
               <a:buNone/>
             </a:pPr>
             <a:r>
@@ -22033,7 +21769,7 @@
           <a:bodyPr wrap="square" lIns="0" tIns="0" rIns="0" bIns="0" rtlCol="0" anchor="ctr"/>
           <a:lstStyle/>
           <a:p>
-            <a:pPr indent="0" marL="0">
+            <a:pPr marL="0" indent="0">
               <a:buNone/>
             </a:pPr>
             <a:r>
@@ -22097,7 +21833,7 @@
           <a:bodyPr wrap="square" lIns="0" tIns="0" rIns="0" bIns="0" rtlCol="0" anchor="ctr"/>
           <a:lstStyle/>
           <a:p>
-            <a:pPr indent="0" marL="0">
+            <a:pPr marL="0" indent="0">
               <a:buNone/>
             </a:pPr>
             <a:r>
@@ -22161,7 +21897,7 @@
           <a:bodyPr wrap="square" lIns="0" tIns="0" rIns="0" bIns="0" rtlCol="0" anchor="ctr"/>
           <a:lstStyle/>
           <a:p>
-            <a:pPr indent="0" marL="0">
+            <a:pPr marL="0" indent="0">
               <a:buNone/>
             </a:pPr>
             <a:r>
@@ -22225,7 +21961,7 @@
           <a:bodyPr wrap="square" lIns="0" tIns="0" rIns="0" bIns="0" rtlCol="0" anchor="ctr"/>
           <a:lstStyle/>
           <a:p>
-            <a:pPr indent="0" marL="0">
+            <a:pPr marL="0" indent="0">
               <a:buNone/>
             </a:pPr>
             <a:r>
@@ -22289,7 +22025,7 @@
           <a:bodyPr wrap="square" lIns="0" tIns="0" rIns="0" bIns="0" rtlCol="0" anchor="ctr"/>
           <a:lstStyle/>
           <a:p>
-            <a:pPr indent="0" marL="0">
+            <a:pPr marL="0" indent="0">
               <a:buNone/>
             </a:pPr>
             <a:r>
@@ -22353,7 +22089,7 @@
           <a:bodyPr wrap="square" lIns="0" tIns="0" rIns="0" bIns="0" rtlCol="0" anchor="ctr"/>
           <a:lstStyle/>
           <a:p>
-            <a:pPr indent="0" marL="0">
+            <a:pPr marL="0" indent="0">
               <a:buNone/>
             </a:pPr>
             <a:r>
@@ -22417,7 +22153,7 @@
           <a:bodyPr wrap="square" lIns="0" tIns="0" rIns="0" bIns="0" rtlCol="0" anchor="ctr"/>
           <a:lstStyle/>
           <a:p>
-            <a:pPr indent="0" marL="0">
+            <a:pPr marL="0" indent="0">
               <a:buNone/>
             </a:pPr>
             <a:r>
@@ -22481,7 +22217,7 @@
           <a:bodyPr wrap="square" lIns="0" tIns="0" rIns="0" bIns="0" rtlCol="0" anchor="ctr"/>
           <a:lstStyle/>
           <a:p>
-            <a:pPr algn="ctr" indent="0" marL="0">
+            <a:pPr marL="0" indent="0" algn="ctr">
               <a:buNone/>
             </a:pPr>
             <a:r>
@@ -22515,6 +22251,7 @@
         <a:solidFill>
           <a:srgbClr val="E8F4F8"/>
         </a:solidFill>
+        <a:effectLst/>
       </p:bgPr>
     </p:bg>
     <p:spTree>
@@ -22602,7 +22339,7 @@
           <a:bodyPr wrap="square" lIns="0" tIns="0" rIns="0" bIns="0" rtlCol="0" anchor="ctr"/>
           <a:lstStyle/>
           <a:p>
-            <a:pPr indent="0" marL="0">
+            <a:pPr marL="0" indent="0">
               <a:buNone/>
             </a:pPr>
             <a:r>
@@ -22641,7 +22378,7 @@
           <a:bodyPr wrap="square" lIns="0" tIns="0" rIns="0" bIns="0" rtlCol="0" anchor="ctr"/>
           <a:lstStyle/>
           <a:p>
-            <a:pPr indent="0" marL="0">
+            <a:pPr marL="0" indent="0">
               <a:buNone/>
             </a:pPr>
             <a:r>
@@ -22683,7 +22420,7 @@
             <a:prstDash val="solid"/>
           </a:ln>
           <a:effectLst>
-            <a:outerShdw sx="100000" sy="100000" kx="0" ky="0" algn="bl" rotWithShape="0" blurRad="63500" dist="25400" dir="8100000">
+            <a:outerShdw blurRad="63500" dist="25400" dir="8100000" algn="bl" rotWithShape="0">
               <a:srgbClr val="000000">
                 <a:alpha val="10000"/>
               </a:srgbClr>
@@ -22737,7 +22474,7 @@
           <a:bodyPr wrap="square" lIns="0" tIns="0" rIns="0" bIns="0" rtlCol="0" anchor="ctr"/>
           <a:lstStyle/>
           <a:p>
-            <a:pPr indent="0" marL="0">
+            <a:pPr marL="0" indent="0">
               <a:buNone/>
             </a:pPr>
             <a:r>
@@ -22801,7 +22538,7 @@
           <a:bodyPr wrap="square" lIns="0" tIns="0" rIns="0" bIns="0" rtlCol="0" anchor="ctr"/>
           <a:lstStyle/>
           <a:p>
-            <a:pPr indent="0" marL="0">
+            <a:pPr marL="0" indent="0">
               <a:buNone/>
             </a:pPr>
             <a:r>
@@ -22840,7 +22577,7 @@
           <a:bodyPr wrap="square" lIns="0" tIns="0" rIns="0" bIns="0" rtlCol="0" anchor="ctr"/>
           <a:lstStyle/>
           <a:p>
-            <a:pPr indent="0" marL="0">
+            <a:pPr marL="0" indent="0">
               <a:buNone/>
             </a:pPr>
             <a:r>
@@ -22879,7 +22616,7 @@
           <a:bodyPr wrap="square" lIns="0" tIns="0" rIns="0" bIns="0" rtlCol="0" anchor="ctr"/>
           <a:lstStyle/>
           <a:p>
-            <a:pPr indent="0" marL="0">
+            <a:pPr marL="0" indent="0">
               <a:buNone/>
             </a:pPr>
             <a:r>
@@ -22943,7 +22680,7 @@
           <a:bodyPr wrap="square" lIns="0" tIns="0" rIns="0" bIns="0" rtlCol="0" anchor="ctr"/>
           <a:lstStyle/>
           <a:p>
-            <a:pPr indent="0" marL="0">
+            <a:pPr marL="0" indent="0">
               <a:buNone/>
             </a:pPr>
             <a:r>
@@ -22982,7 +22719,7 @@
           <a:bodyPr wrap="square" lIns="0" tIns="0" rIns="0" bIns="0" rtlCol="0" anchor="ctr"/>
           <a:lstStyle/>
           <a:p>
-            <a:pPr indent="0" marL="0">
+            <a:pPr marL="0" indent="0">
               <a:buNone/>
             </a:pPr>
             <a:r>
@@ -22999,7 +22736,7 @@
             <a:endParaRPr lang="en-US" sz="1000" dirty="0"/>
           </a:p>
           <a:p>
-            <a:pPr indent="0" marL="0">
+            <a:pPr marL="0" indent="0">
               <a:buNone/>
             </a:pPr>
             <a:r>
@@ -23038,7 +22775,7 @@
           <a:bodyPr wrap="square" lIns="0" tIns="0" rIns="0" bIns="0" rtlCol="0" anchor="ctr"/>
           <a:lstStyle/>
           <a:p>
-            <a:pPr indent="0" marL="0">
+            <a:pPr marL="0" indent="0">
               <a:buNone/>
             </a:pPr>
             <a:r>
@@ -23102,7 +22839,7 @@
           <a:bodyPr wrap="square" lIns="0" tIns="0" rIns="0" bIns="0" rtlCol="0" anchor="ctr"/>
           <a:lstStyle/>
           <a:p>
-            <a:pPr indent="0" marL="0">
+            <a:pPr marL="0" indent="0">
               <a:buNone/>
             </a:pPr>
             <a:r>
@@ -23141,7 +22878,7 @@
           <a:bodyPr wrap="square" lIns="0" tIns="0" rIns="0" bIns="0" rtlCol="0" anchor="ctr"/>
           <a:lstStyle/>
           <a:p>
-            <a:pPr indent="0" marL="0">
+            <a:pPr marL="0" indent="0">
               <a:buNone/>
             </a:pPr>
             <a:r>
@@ -23158,7 +22895,7 @@
             <a:endParaRPr lang="en-US" sz="1000" dirty="0"/>
           </a:p>
           <a:p>
-            <a:pPr indent="0" marL="0">
+            <a:pPr marL="0" indent="0">
               <a:buNone/>
             </a:pPr>
             <a:r>
@@ -23197,7 +22934,7 @@
           <a:bodyPr wrap="square" lIns="0" tIns="0" rIns="0" bIns="0" rtlCol="0" anchor="ctr"/>
           <a:lstStyle/>
           <a:p>
-            <a:pPr indent="0" marL="0">
+            <a:pPr marL="0" indent="0">
               <a:buNone/>
             </a:pPr>
             <a:r>
@@ -23261,7 +22998,7 @@
           <a:bodyPr wrap="square" lIns="0" tIns="0" rIns="0" bIns="0" rtlCol="0" anchor="ctr"/>
           <a:lstStyle/>
           <a:p>
-            <a:pPr indent="0" marL="0">
+            <a:pPr marL="0" indent="0">
               <a:buNone/>
             </a:pPr>
             <a:r>
@@ -23300,7 +23037,7 @@
           <a:bodyPr wrap="square" lIns="0" tIns="0" rIns="0" bIns="0" rtlCol="0" anchor="ctr"/>
           <a:lstStyle/>
           <a:p>
-            <a:pPr indent="0" marL="0">
+            <a:pPr marL="0" indent="0">
               <a:buNone/>
             </a:pPr>
             <a:r>
@@ -23317,7 +23054,7 @@
             <a:endParaRPr lang="en-US" sz="1000" dirty="0"/>
           </a:p>
           <a:p>
-            <a:pPr indent="0" marL="0">
+            <a:pPr marL="0" indent="0">
               <a:buNone/>
             </a:pPr>
             <a:r>
@@ -23356,7 +23093,7 @@
           <a:bodyPr wrap="square" lIns="0" tIns="0" rIns="0" bIns="0" rtlCol="0" anchor="ctr"/>
           <a:lstStyle/>
           <a:p>
-            <a:pPr indent="0" marL="0">
+            <a:pPr marL="0" indent="0">
               <a:buNone/>
             </a:pPr>
             <a:r>
@@ -23420,7 +23157,7 @@
           <a:bodyPr wrap="square" lIns="0" tIns="0" rIns="0" bIns="0" rtlCol="0" anchor="ctr"/>
           <a:lstStyle/>
           <a:p>
-            <a:pPr indent="0" marL="0">
+            <a:pPr marL="0" indent="0">
               <a:buNone/>
             </a:pPr>
             <a:r>
@@ -23459,7 +23196,7 @@
           <a:bodyPr wrap="square" lIns="0" tIns="0" rIns="0" bIns="0" rtlCol="0" anchor="ctr"/>
           <a:lstStyle/>
           <a:p>
-            <a:pPr indent="0" marL="0">
+            <a:pPr marL="0" indent="0">
               <a:buNone/>
             </a:pPr>
             <a:r>
@@ -23476,7 +23213,7 @@
             <a:endParaRPr lang="en-US" sz="1000" dirty="0"/>
           </a:p>
           <a:p>
-            <a:pPr indent="0" marL="0">
+            <a:pPr marL="0" indent="0">
               <a:buNone/>
             </a:pPr>
             <a:r>
@@ -23515,7 +23252,7 @@
           <a:bodyPr wrap="square" lIns="0" tIns="0" rIns="0" bIns="0" rtlCol="0" anchor="ctr"/>
           <a:lstStyle/>
           <a:p>
-            <a:pPr indent="0" marL="0">
+            <a:pPr marL="0" indent="0">
               <a:buNone/>
             </a:pPr>
             <a:r>
@@ -23557,7 +23294,7 @@
             <a:prstDash val="solid"/>
           </a:ln>
           <a:effectLst>
-            <a:outerShdw sx="100000" sy="100000" kx="0" ky="0" algn="bl" rotWithShape="0" blurRad="63500" dist="25400" dir="8100000">
+            <a:outerShdw blurRad="63500" dist="25400" dir="8100000" algn="bl" rotWithShape="0">
               <a:srgbClr val="000000">
                 <a:alpha val="10000"/>
               </a:srgbClr>
@@ -23611,7 +23348,7 @@
           <a:bodyPr wrap="square" lIns="0" tIns="0" rIns="0" bIns="0" rtlCol="0" anchor="ctr"/>
           <a:lstStyle/>
           <a:p>
-            <a:pPr indent="0" marL="0">
+            <a:pPr marL="0" indent="0">
               <a:buNone/>
             </a:pPr>
             <a:r>
@@ -23675,7 +23412,7 @@
           <a:bodyPr wrap="square" lIns="0" tIns="0" rIns="0" bIns="0" rtlCol="0" anchor="ctr"/>
           <a:lstStyle/>
           <a:p>
-            <a:pPr indent="0" marL="0">
+            <a:pPr marL="0" indent="0">
               <a:buNone/>
             </a:pPr>
             <a:r>
@@ -23739,7 +23476,7 @@
           <a:bodyPr wrap="square" lIns="0" tIns="0" rIns="0" bIns="0" rtlCol="0" anchor="ctr"/>
           <a:lstStyle/>
           <a:p>
-            <a:pPr indent="0" marL="0">
+            <a:pPr marL="0" indent="0">
               <a:buNone/>
             </a:pPr>
             <a:r>
@@ -23803,7 +23540,7 @@
           <a:bodyPr wrap="square" lIns="0" tIns="0" rIns="0" bIns="0" rtlCol="0" anchor="ctr"/>
           <a:lstStyle/>
           <a:p>
-            <a:pPr indent="0" marL="0">
+            <a:pPr marL="0" indent="0">
               <a:buNone/>
             </a:pPr>
             <a:r>
@@ -23867,7 +23604,7 @@
           <a:bodyPr wrap="square" lIns="0" tIns="0" rIns="0" bIns="0" rtlCol="0" anchor="ctr"/>
           <a:lstStyle/>
           <a:p>
-            <a:pPr indent="0" marL="0">
+            <a:pPr marL="0" indent="0">
               <a:buNone/>
             </a:pPr>
             <a:r>
@@ -23931,7 +23668,7 @@
           <a:bodyPr wrap="square" lIns="0" tIns="0" rIns="0" bIns="0" rtlCol="0" anchor="ctr"/>
           <a:lstStyle/>
           <a:p>
-            <a:pPr indent="0" marL="0">
+            <a:pPr marL="0" indent="0">
               <a:buNone/>
             </a:pPr>
             <a:r>
@@ -23995,7 +23732,7 @@
           <a:bodyPr wrap="square" lIns="0" tIns="0" rIns="0" bIns="0" rtlCol="0" anchor="ctr"/>
           <a:lstStyle/>
           <a:p>
-            <a:pPr indent="0" marL="0">
+            <a:pPr marL="0" indent="0">
               <a:buNone/>
             </a:pPr>
             <a:r>
@@ -24059,7 +23796,7 @@
           <a:bodyPr wrap="square" lIns="0" tIns="0" rIns="0" bIns="0" rtlCol="0" anchor="ctr"/>
           <a:lstStyle/>
           <a:p>
-            <a:pPr indent="0" marL="0">
+            <a:pPr marL="0" indent="0">
               <a:buNone/>
             </a:pPr>
             <a:r>
@@ -24123,7 +23860,7 @@
           <a:bodyPr wrap="square" lIns="0" tIns="0" rIns="0" bIns="0" rtlCol="0" anchor="ctr"/>
           <a:lstStyle/>
           <a:p>
-            <a:pPr indent="0" marL="0">
+            <a:pPr marL="0" indent="0">
               <a:buNone/>
             </a:pPr>
             <a:r>
@@ -24187,7 +23924,7 @@
           <a:bodyPr wrap="square" lIns="0" tIns="0" rIns="0" bIns="0" rtlCol="0" anchor="ctr"/>
           <a:lstStyle/>
           <a:p>
-            <a:pPr indent="0" marL="0">
+            <a:pPr marL="0" indent="0">
               <a:buNone/>
             </a:pPr>
             <a:r>
@@ -24251,7 +23988,7 @@
           <a:bodyPr wrap="square" lIns="0" tIns="0" rIns="0" bIns="0" rtlCol="0" anchor="ctr"/>
           <a:lstStyle/>
           <a:p>
-            <a:pPr indent="0" marL="0">
+            <a:pPr marL="0" indent="0">
               <a:buNone/>
             </a:pPr>
             <a:r>
@@ -24315,7 +24052,7 @@
           <a:bodyPr wrap="square" lIns="0" tIns="0" rIns="0" bIns="0" rtlCol="0" anchor="ctr"/>
           <a:lstStyle/>
           <a:p>
-            <a:pPr indent="0" marL="0">
+            <a:pPr marL="0" indent="0">
               <a:buNone/>
             </a:pPr>
             <a:r>
@@ -24379,7 +24116,7 @@
           <a:bodyPr wrap="square" lIns="0" tIns="0" rIns="0" bIns="0" rtlCol="0" anchor="ctr"/>
           <a:lstStyle/>
           <a:p>
-            <a:pPr indent="0" marL="0">
+            <a:pPr marL="0" indent="0">
               <a:buNone/>
             </a:pPr>
             <a:r>
@@ -24443,7 +24180,7 @@
           <a:bodyPr wrap="square" lIns="0" tIns="0" rIns="0" bIns="0" rtlCol="0" anchor="ctr"/>
           <a:lstStyle/>
           <a:p>
-            <a:pPr indent="0" marL="0">
+            <a:pPr marL="0" indent="0">
               <a:buNone/>
             </a:pPr>
             <a:r>
@@ -24507,7 +24244,7 @@
           <a:bodyPr wrap="square" lIns="0" tIns="0" rIns="0" bIns="0" rtlCol="0" anchor="ctr"/>
           <a:lstStyle/>
           <a:p>
-            <a:pPr indent="0" marL="0">
+            <a:pPr marL="0" indent="0">
               <a:buNone/>
             </a:pPr>
             <a:r>
@@ -24571,7 +24308,7 @@
           <a:bodyPr wrap="square" lIns="0" tIns="0" rIns="0" bIns="0" rtlCol="0" anchor="ctr"/>
           <a:lstStyle/>
           <a:p>
-            <a:pPr indent="0" marL="0">
+            <a:pPr marL="0" indent="0">
               <a:buNone/>
             </a:pPr>
             <a:r>
@@ -24635,7 +24372,7 @@
           <a:bodyPr wrap="square" lIns="0" tIns="0" rIns="0" bIns="0" rtlCol="0" anchor="ctr"/>
           <a:lstStyle/>
           <a:p>
-            <a:pPr indent="0" marL="0">
+            <a:pPr marL="0" indent="0">
               <a:buNone/>
             </a:pPr>
             <a:r>
@@ -24699,7 +24436,7 @@
           <a:bodyPr wrap="square" lIns="0" tIns="0" rIns="0" bIns="0" rtlCol="0" anchor="ctr"/>
           <a:lstStyle/>
           <a:p>
-            <a:pPr indent="0" marL="0">
+            <a:pPr marL="0" indent="0">
               <a:buNone/>
             </a:pPr>
             <a:r>
@@ -24763,7 +24500,7 @@
           <a:bodyPr wrap="square" lIns="0" tIns="0" rIns="0" bIns="0" rtlCol="0" anchor="ctr"/>
           <a:lstStyle/>
           <a:p>
-            <a:pPr indent="0" marL="0">
+            <a:pPr marL="0" indent="0">
               <a:buNone/>
             </a:pPr>
             <a:r>
@@ -24827,7 +24564,7 @@
           <a:bodyPr wrap="square" lIns="0" tIns="0" rIns="0" bIns="0" rtlCol="0" anchor="ctr"/>
           <a:lstStyle/>
           <a:p>
-            <a:pPr indent="0" marL="0">
+            <a:pPr marL="0" indent="0">
               <a:buNone/>
             </a:pPr>
             <a:r>
@@ -24891,7 +24628,7 @@
           <a:bodyPr wrap="square" lIns="0" tIns="0" rIns="0" bIns="0" rtlCol="0" anchor="ctr"/>
           <a:lstStyle/>
           <a:p>
-            <a:pPr indent="0" marL="0">
+            <a:pPr marL="0" indent="0">
               <a:buNone/>
             </a:pPr>
             <a:r>
@@ -24925,6 +24662,7 @@
         <a:solidFill>
           <a:srgbClr val="1E2D3D"/>
         </a:solidFill>
+        <a:effectLst/>
       </p:bgPr>
     </p:bg>
     <p:spTree>
@@ -25012,7 +24750,7 @@
           <a:bodyPr wrap="square" lIns="0" tIns="0" rIns="0" bIns="0" rtlCol="0" anchor="ctr"/>
           <a:lstStyle/>
           <a:p>
-            <a:pPr indent="0" marL="0">
+            <a:pPr marL="0" indent="0">
               <a:buNone/>
             </a:pPr>
             <a:r>
@@ -25051,7 +24789,7 @@
           <a:bodyPr wrap="square" lIns="0" tIns="0" rIns="0" bIns="0" rtlCol="0" anchor="ctr"/>
           <a:lstStyle/>
           <a:p>
-            <a:pPr indent="0" marL="0">
+            <a:pPr marL="0" indent="0">
               <a:buNone/>
             </a:pPr>
             <a:r>
@@ -25090,7 +24828,7 @@
           <a:bodyPr wrap="square" lIns="0" tIns="0" rIns="0" bIns="0" rtlCol="0" anchor="ctr"/>
           <a:lstStyle/>
           <a:p>
-            <a:pPr indent="0" marL="0">
+            <a:pPr marL="0" indent="0">
               <a:buNone/>
             </a:pPr>
             <a:r>
@@ -25129,7 +24867,7 @@
           <a:bodyPr wrap="square" lIns="0" tIns="0" rIns="0" bIns="0" rtlCol="0" anchor="ctr"/>
           <a:lstStyle/>
           <a:p>
-            <a:pPr indent="0" marL="0">
+            <a:pPr marL="0" indent="0">
               <a:buNone/>
             </a:pPr>
             <a:r>
@@ -25168,7 +24906,7 @@
           <a:bodyPr wrap="square" lIns="0" tIns="0" rIns="0" bIns="0" rtlCol="0" anchor="ctr"/>
           <a:lstStyle/>
           <a:p>
-            <a:pPr indent="0" marL="0">
+            <a:pPr marL="0" indent="0">
               <a:buNone/>
             </a:pPr>
             <a:r>
@@ -25207,7 +24945,7 @@
           <a:bodyPr wrap="square" lIns="0" tIns="0" rIns="0" bIns="0" rtlCol="0" anchor="ctr"/>
           <a:lstStyle/>
           <a:p>
-            <a:pPr indent="0" marL="0">
+            <a:pPr marL="0" indent="0">
               <a:buNone/>
             </a:pPr>
             <a:r>
@@ -25246,7 +24984,7 @@
           <a:bodyPr wrap="square" lIns="0" tIns="0" rIns="0" bIns="0" rtlCol="0" anchor="ctr"/>
           <a:lstStyle/>
           <a:p>
-            <a:pPr indent="0" marL="0">
+            <a:pPr marL="0" indent="0">
               <a:buNone/>
             </a:pPr>
             <a:r>
@@ -25285,7 +25023,7 @@
           <a:bodyPr wrap="square" lIns="0" tIns="0" rIns="0" bIns="0" rtlCol="0" anchor="ctr"/>
           <a:lstStyle/>
           <a:p>
-            <a:pPr indent="0" marL="0">
+            <a:pPr marL="0" indent="0">
               <a:buNone/>
             </a:pPr>
             <a:endParaRPr lang="en-US" sz="1000" dirty="0"/>
@@ -25313,7 +25051,7 @@
           <a:bodyPr wrap="square" lIns="0" tIns="0" rIns="0" bIns="0" rtlCol="0" anchor="ctr"/>
           <a:lstStyle/>
           <a:p>
-            <a:pPr indent="0" marL="0">
+            <a:pPr marL="0" indent="0">
               <a:buNone/>
             </a:pPr>
             <a:r>
@@ -25352,7 +25090,7 @@
           <a:bodyPr wrap="square" lIns="0" tIns="0" rIns="0" bIns="0" rtlCol="0" anchor="ctr"/>
           <a:lstStyle/>
           <a:p>
-            <a:pPr indent="0" marL="0">
+            <a:pPr marL="0" indent="0">
               <a:buNone/>
             </a:pPr>
             <a:r>
@@ -25391,7 +25129,7 @@
           <a:bodyPr wrap="square" lIns="0" tIns="0" rIns="0" bIns="0" rtlCol="0" anchor="ctr"/>
           <a:lstStyle/>
           <a:p>
-            <a:pPr indent="0" marL="0">
+            <a:pPr marL="0" indent="0">
               <a:buNone/>
             </a:pPr>
             <a:r>
@@ -25430,7 +25168,7 @@
           <a:bodyPr wrap="square" lIns="0" tIns="0" rIns="0" bIns="0" rtlCol="0" anchor="ctr"/>
           <a:lstStyle/>
           <a:p>
-            <a:pPr indent="0" marL="0">
+            <a:pPr marL="0" indent="0">
               <a:buNone/>
             </a:pPr>
             <a:r>
@@ -25469,7 +25207,7 @@
           <a:bodyPr wrap="square" lIns="0" tIns="0" rIns="0" bIns="0" rtlCol="0" anchor="ctr"/>
           <a:lstStyle/>
           <a:p>
-            <a:pPr indent="0" marL="0">
+            <a:pPr marL="0" indent="0">
               <a:buNone/>
             </a:pPr>
             <a:r>
@@ -25508,7 +25246,7 @@
           <a:bodyPr wrap="square" lIns="0" tIns="0" rIns="0" bIns="0" rtlCol="0" anchor="ctr"/>
           <a:lstStyle/>
           <a:p>
-            <a:pPr indent="0" marL="0">
+            <a:pPr marL="0" indent="0">
               <a:buNone/>
             </a:pPr>
             <a:endParaRPr lang="en-US" sz="1000" dirty="0"/>
@@ -25536,7 +25274,7 @@
           <a:bodyPr wrap="square" lIns="0" tIns="0" rIns="0" bIns="0" rtlCol="0" anchor="ctr"/>
           <a:lstStyle/>
           <a:p>
-            <a:pPr indent="0" marL="0">
+            <a:pPr marL="0" indent="0">
               <a:buNone/>
             </a:pPr>
             <a:r>
@@ -25575,7 +25313,7 @@
           <a:bodyPr wrap="square" lIns="0" tIns="0" rIns="0" bIns="0" rtlCol="0" anchor="ctr"/>
           <a:lstStyle/>
           <a:p>
-            <a:pPr indent="0" marL="0">
+            <a:pPr marL="0" indent="0">
               <a:buNone/>
             </a:pPr>
             <a:r>
@@ -25614,7 +25352,7 @@
           <a:bodyPr wrap="square" lIns="0" tIns="0" rIns="0" bIns="0" rtlCol="0" anchor="ctr"/>
           <a:lstStyle/>
           <a:p>
-            <a:pPr indent="0" marL="0">
+            <a:pPr marL="0" indent="0">
               <a:buNone/>
             </a:pPr>
             <a:r>
@@ -25653,7 +25391,7 @@
           <a:bodyPr wrap="square" lIns="0" tIns="0" rIns="0" bIns="0" rtlCol="0" anchor="ctr"/>
           <a:lstStyle/>
           <a:p>
-            <a:pPr indent="0" marL="0">
+            <a:pPr marL="0" indent="0">
               <a:buNone/>
             </a:pPr>
             <a:r>
@@ -25692,7 +25430,7 @@
           <a:bodyPr wrap="square" lIns="0" tIns="0" rIns="0" bIns="0" rtlCol="0" anchor="ctr"/>
           <a:lstStyle/>
           <a:p>
-            <a:pPr indent="0" marL="0">
+            <a:pPr marL="0" indent="0">
               <a:buNone/>
             </a:pPr>
             <a:r>
@@ -25731,7 +25469,7 @@
           <a:bodyPr wrap="square" lIns="0" tIns="0" rIns="0" bIns="0" rtlCol="0" anchor="ctr"/>
           <a:lstStyle/>
           <a:p>
-            <a:pPr indent="0" marL="0">
+            <a:pPr marL="0" indent="0">
               <a:buNone/>
             </a:pPr>
             <a:r>
@@ -25770,7 +25508,7 @@
           <a:bodyPr wrap="square" lIns="0" tIns="0" rIns="0" bIns="0" rtlCol="0" anchor="ctr"/>
           <a:lstStyle/>
           <a:p>
-            <a:pPr indent="0" marL="0">
+            <a:pPr marL="0" indent="0">
               <a:buNone/>
             </a:pPr>
             <a:r>
@@ -25809,7 +25547,7 @@
           <a:bodyPr wrap="square" lIns="0" tIns="0" rIns="0" bIns="0" rtlCol="0" anchor="ctr"/>
           <a:lstStyle/>
           <a:p>
-            <a:pPr indent="0" marL="0">
+            <a:pPr marL="0" indent="0">
               <a:buNone/>
             </a:pPr>
             <a:r>
@@ -25873,7 +25611,7 @@
           <a:bodyPr wrap="square" lIns="0" tIns="0" rIns="0" bIns="0" rtlCol="0" anchor="ctr"/>
           <a:lstStyle/>
           <a:p>
-            <a:pPr indent="0" marL="0">
+            <a:pPr marL="0" indent="0">
               <a:buNone/>
             </a:pPr>
             <a:r>
@@ -25912,7 +25650,7 @@
           <a:bodyPr wrap="square" lIns="0" tIns="0" rIns="0" bIns="0" rtlCol="0" anchor="ctr"/>
           <a:lstStyle/>
           <a:p>
-            <a:pPr indent="0" marL="0">
+            <a:pPr marL="0" indent="0">
               <a:buNone/>
             </a:pPr>
             <a:r>
@@ -25951,7 +25689,7 @@
           <a:bodyPr wrap="square" lIns="0" tIns="0" rIns="0" bIns="0" rtlCol="0" anchor="ctr"/>
           <a:lstStyle/>
           <a:p>
-            <a:pPr indent="0" marL="0">
+            <a:pPr marL="0" indent="0">
               <a:buNone/>
             </a:pPr>
             <a:r>
@@ -25990,7 +25728,7 @@
           <a:bodyPr wrap="square" lIns="0" tIns="0" rIns="0" bIns="0" rtlCol="0" anchor="ctr"/>
           <a:lstStyle/>
           <a:p>
-            <a:pPr indent="0" marL="0">
+            <a:pPr marL="0" indent="0">
               <a:buNone/>
             </a:pPr>
             <a:r>
@@ -26029,7 +25767,7 @@
           <a:bodyPr wrap="square" lIns="0" tIns="0" rIns="0" bIns="0" rtlCol="0" anchor="ctr"/>
           <a:lstStyle/>
           <a:p>
-            <a:pPr indent="0" marL="0">
+            <a:pPr marL="0" indent="0">
               <a:buNone/>
             </a:pPr>
             <a:r>
@@ -26068,7 +25806,7 @@
           <a:bodyPr wrap="square" lIns="0" tIns="0" rIns="0" bIns="0" rtlCol="0" anchor="ctr"/>
           <a:lstStyle/>
           <a:p>
-            <a:pPr indent="0" marL="0">
+            <a:pPr marL="0" indent="0">
               <a:buNone/>
             </a:pPr>
             <a:r>
@@ -26107,7 +25845,7 @@
           <a:bodyPr wrap="square" lIns="0" tIns="0" rIns="0" bIns="0" rtlCol="0" anchor="ctr"/>
           <a:lstStyle/>
           <a:p>
-            <a:pPr indent="0" marL="0">
+            <a:pPr marL="0" indent="0">
               <a:buNone/>
             </a:pPr>
             <a:endParaRPr lang="en-US" sz="1050" dirty="0"/>
@@ -26135,7 +25873,7 @@
           <a:bodyPr wrap="square" lIns="0" tIns="0" rIns="0" bIns="0" rtlCol="0" anchor="ctr"/>
           <a:lstStyle/>
           <a:p>
-            <a:pPr indent="0" marL="0">
+            <a:pPr marL="0" indent="0">
               <a:buNone/>
             </a:pPr>
             <a:r>
@@ -26174,7 +25912,7 @@
           <a:bodyPr wrap="square" lIns="0" tIns="0" rIns="0" bIns="0" rtlCol="0" anchor="ctr"/>
           <a:lstStyle/>
           <a:p>
-            <a:pPr indent="0" marL="0">
+            <a:pPr marL="0" indent="0">
               <a:buNone/>
             </a:pPr>
             <a:r>
@@ -26213,7 +25951,7 @@
           <a:bodyPr wrap="square" lIns="0" tIns="0" rIns="0" bIns="0" rtlCol="0" anchor="ctr"/>
           <a:lstStyle/>
           <a:p>
-            <a:pPr indent="0" marL="0">
+            <a:pPr marL="0" indent="0">
               <a:buNone/>
             </a:pPr>
             <a:r>
@@ -26252,7 +25990,7 @@
           <a:bodyPr wrap="square" lIns="0" tIns="0" rIns="0" bIns="0" rtlCol="0" anchor="ctr"/>
           <a:lstStyle/>
           <a:p>
-            <a:pPr indent="0" marL="0">
+            <a:pPr marL="0" indent="0">
               <a:buNone/>
             </a:pPr>
             <a:r>
@@ -26291,7 +26029,7 @@
           <a:bodyPr wrap="square" lIns="0" tIns="0" rIns="0" bIns="0" rtlCol="0" anchor="ctr"/>
           <a:lstStyle/>
           <a:p>
-            <a:pPr indent="0" marL="0">
+            <a:pPr marL="0" indent="0">
               <a:buNone/>
             </a:pPr>
             <a:r>
@@ -26330,7 +26068,7 @@
           <a:bodyPr wrap="square" lIns="0" tIns="0" rIns="0" bIns="0" rtlCol="0" anchor="ctr"/>
           <a:lstStyle/>
           <a:p>
-            <a:pPr indent="0" marL="0">
+            <a:pPr marL="0" indent="0">
               <a:buNone/>
             </a:pPr>
             <a:endParaRPr lang="en-US" sz="1050" dirty="0"/>
@@ -26358,7 +26096,7 @@
           <a:bodyPr wrap="square" lIns="0" tIns="0" rIns="0" bIns="0" rtlCol="0" anchor="ctr"/>
           <a:lstStyle/>
           <a:p>
-            <a:pPr indent="0" marL="0">
+            <a:pPr marL="0" indent="0">
               <a:buNone/>
             </a:pPr>
             <a:r>
@@ -26397,7 +26135,7 @@
           <a:bodyPr wrap="square" lIns="0" tIns="0" rIns="0" bIns="0" rtlCol="0" anchor="ctr"/>
           <a:lstStyle/>
           <a:p>
-            <a:pPr indent="0" marL="0">
+            <a:pPr marL="0" indent="0">
               <a:buNone/>
             </a:pPr>
             <a:r>
@@ -26436,7 +26174,7 @@
           <a:bodyPr wrap="square" lIns="0" tIns="0" rIns="0" bIns="0" rtlCol="0" anchor="ctr"/>
           <a:lstStyle/>
           <a:p>
-            <a:pPr indent="0" marL="0">
+            <a:pPr marL="0" indent="0">
               <a:buNone/>
             </a:pPr>
             <a:r>
@@ -26475,7 +26213,7 @@
           <a:bodyPr wrap="square" lIns="0" tIns="0" rIns="0" bIns="0" rtlCol="0" anchor="ctr"/>
           <a:lstStyle/>
           <a:p>
-            <a:pPr indent="0" marL="0">
+            <a:pPr marL="0" indent="0">
               <a:buNone/>
             </a:pPr>
             <a:r>
@@ -26794,4 +26532,319 @@
     </a:ext>
   </a:extLst>
 </a:theme>
+</file>
+
+<file path=ppt/theme/theme2.xml><?xml version="1.0" encoding="utf-8"?>
+<a:theme xmlns:a="http://schemas.openxmlformats.org/drawingml/2006/main" name="Office Theme">
+  <a:themeElements>
+    <a:clrScheme name="Office">
+      <a:dk1>
+        <a:sysClr val="windowText" lastClr="000000"/>
+      </a:dk1>
+      <a:lt1>
+        <a:sysClr val="window" lastClr="FFFFFF"/>
+      </a:lt1>
+      <a:dk2>
+        <a:srgbClr val="0E2841"/>
+      </a:dk2>
+      <a:lt2>
+        <a:srgbClr val="E8E8E8"/>
+      </a:lt2>
+      <a:accent1>
+        <a:srgbClr val="156082"/>
+      </a:accent1>
+      <a:accent2>
+        <a:srgbClr val="E97132"/>
+      </a:accent2>
+      <a:accent3>
+        <a:srgbClr val="196B24"/>
+      </a:accent3>
+      <a:accent4>
+        <a:srgbClr val="0F9ED5"/>
+      </a:accent4>
+      <a:accent5>
+        <a:srgbClr val="A02B93"/>
+      </a:accent5>
+      <a:accent6>
+        <a:srgbClr val="4EA72E"/>
+      </a:accent6>
+      <a:hlink>
+        <a:srgbClr val="467886"/>
+      </a:hlink>
+      <a:folHlink>
+        <a:srgbClr val="96607D"/>
+      </a:folHlink>
+    </a:clrScheme>
+    <a:fontScheme name="Office">
+      <a:majorFont>
+        <a:latin typeface="Aptos Display" panose="02110004020202020204"/>
+        <a:ea typeface=""/>
+        <a:cs typeface=""/>
+        <a:font script="Jpan" typeface="游ゴシック Light"/>
+        <a:font script="Hang" typeface="맑은 고딕"/>
+        <a:font script="Hans" typeface="等线 Light"/>
+        <a:font script="Hant" typeface="新細明體"/>
+        <a:font script="Arab" typeface="Times New Roman"/>
+        <a:font script="Hebr" typeface="Times New Roman"/>
+        <a:font script="Thai" typeface="Angsana New"/>
+        <a:font script="Ethi" typeface="Nyala"/>
+        <a:font script="Beng" typeface="Vrinda"/>
+        <a:font script="Gujr" typeface="Shruti"/>
+        <a:font script="Khmr" typeface="MoolBoran"/>
+        <a:font script="Knda" typeface="Tunga"/>
+        <a:font script="Guru" typeface="Raavi"/>
+        <a:font script="Cans" typeface="Euphemia"/>
+        <a:font script="Cher" typeface="Plantagenet Cherokee"/>
+        <a:font script="Yiii" typeface="Microsoft Yi Baiti"/>
+        <a:font script="Tibt" typeface="Microsoft Himalaya"/>
+        <a:font script="Thaa" typeface="MV Boli"/>
+        <a:font script="Deva" typeface="Mangal"/>
+        <a:font script="Telu" typeface="Gautami"/>
+        <a:font script="Taml" typeface="Latha"/>
+        <a:font script="Syrc" typeface="Estrangelo Edessa"/>
+        <a:font script="Orya" typeface="Kalinga"/>
+        <a:font script="Mlym" typeface="Kartika"/>
+        <a:font script="Laoo" typeface="DokChampa"/>
+        <a:font script="Sinh" typeface="Iskoola Pota"/>
+        <a:font script="Mong" typeface="Mongolian Baiti"/>
+        <a:font script="Viet" typeface="Times New Roman"/>
+        <a:font script="Uigh" typeface="Microsoft Uighur"/>
+        <a:font script="Geor" typeface="Sylfaen"/>
+        <a:font script="Armn" typeface="Arial"/>
+        <a:font script="Bugi" typeface="Leelawadee UI"/>
+        <a:font script="Bopo" typeface="Microsoft JhengHei"/>
+        <a:font script="Java" typeface="Javanese Text"/>
+        <a:font script="Lisu" typeface="Segoe UI"/>
+        <a:font script="Mymr" typeface="Myanmar Text"/>
+        <a:font script="Nkoo" typeface="Ebrima"/>
+        <a:font script="Olck" typeface="Nirmala UI"/>
+        <a:font script="Osma" typeface="Ebrima"/>
+        <a:font script="Phag" typeface="Phagspa"/>
+        <a:font script="Syrn" typeface="Estrangelo Edessa"/>
+        <a:font script="Syrj" typeface="Estrangelo Edessa"/>
+        <a:font script="Syre" typeface="Estrangelo Edessa"/>
+        <a:font script="Sora" typeface="Nirmala UI"/>
+        <a:font script="Tale" typeface="Microsoft Tai Le"/>
+        <a:font script="Talu" typeface="Microsoft New Tai Lue"/>
+        <a:font script="Tfng" typeface="Ebrima"/>
+      </a:majorFont>
+      <a:minorFont>
+        <a:latin typeface="Aptos" panose="02110004020202020204"/>
+        <a:ea typeface=""/>
+        <a:cs typeface=""/>
+        <a:font script="Jpan" typeface="游ゴシック"/>
+        <a:font script="Hang" typeface="맑은 고딕"/>
+        <a:font script="Hans" typeface="等线"/>
+        <a:font script="Hant" typeface="新細明體"/>
+        <a:font script="Arab" typeface="Arial"/>
+        <a:font script="Hebr" typeface="Arial"/>
+        <a:font script="Thai" typeface="Cordia New"/>
+        <a:font script="Ethi" typeface="Nyala"/>
+        <a:font script="Beng" typeface="Vrinda"/>
+        <a:font script="Gujr" typeface="Shruti"/>
+        <a:font script="Khmr" typeface="DaunPenh"/>
+        <a:font script="Knda" typeface="Tunga"/>
+        <a:font script="Guru" typeface="Raavi"/>
+        <a:font script="Cans" typeface="Euphemia"/>
+        <a:font script="Cher" typeface="Plantagenet Cherokee"/>
+        <a:font script="Yiii" typeface="Microsoft Yi Baiti"/>
+        <a:font script="Tibt" typeface="Microsoft Himalaya"/>
+        <a:font script="Thaa" typeface="MV Boli"/>
+        <a:font script="Deva" typeface="Mangal"/>
+        <a:font script="Telu" typeface="Gautami"/>
+        <a:font script="Taml" typeface="Latha"/>
+        <a:font script="Syrc" typeface="Estrangelo Edessa"/>
+        <a:font script="Orya" typeface="Kalinga"/>
+        <a:font script="Mlym" typeface="Kartika"/>
+        <a:font script="Laoo" typeface="DokChampa"/>
+        <a:font script="Sinh" typeface="Iskoola Pota"/>
+        <a:font script="Mong" typeface="Mongolian Baiti"/>
+        <a:font script="Viet" typeface="Arial"/>
+        <a:font script="Uigh" typeface="Microsoft Uighur"/>
+        <a:font script="Geor" typeface="Sylfaen"/>
+        <a:font script="Armn" typeface="Arial"/>
+        <a:font script="Bugi" typeface="Leelawadee UI"/>
+        <a:font script="Bopo" typeface="Microsoft JhengHei"/>
+        <a:font script="Java" typeface="Javanese Text"/>
+        <a:font script="Lisu" typeface="Segoe UI"/>
+        <a:font script="Mymr" typeface="Myanmar Text"/>
+        <a:font script="Nkoo" typeface="Ebrima"/>
+        <a:font script="Olck" typeface="Nirmala UI"/>
+        <a:font script="Osma" typeface="Ebrima"/>
+        <a:font script="Phag" typeface="Phagspa"/>
+        <a:font script="Syrn" typeface="Estrangelo Edessa"/>
+        <a:font script="Syrj" typeface="Estrangelo Edessa"/>
+        <a:font script="Syre" typeface="Estrangelo Edessa"/>
+        <a:font script="Sora" typeface="Nirmala UI"/>
+        <a:font script="Tale" typeface="Microsoft Tai Le"/>
+        <a:font script="Talu" typeface="Microsoft New Tai Lue"/>
+        <a:font script="Tfng" typeface="Ebrima"/>
+      </a:minorFont>
+    </a:fontScheme>
+    <a:fmtScheme name="Office">
+      <a:fillStyleLst>
+        <a:solidFill>
+          <a:schemeClr val="phClr"/>
+        </a:solidFill>
+        <a:gradFill rotWithShape="1">
+          <a:gsLst>
+            <a:gs pos="0">
+              <a:schemeClr val="phClr">
+                <a:lumMod val="110000"/>
+                <a:satMod val="105000"/>
+                <a:tint val="67000"/>
+              </a:schemeClr>
+            </a:gs>
+            <a:gs pos="50000">
+              <a:schemeClr val="phClr">
+                <a:lumMod val="105000"/>
+                <a:satMod val="103000"/>
+                <a:tint val="73000"/>
+              </a:schemeClr>
+            </a:gs>
+            <a:gs pos="100000">
+              <a:schemeClr val="phClr">
+                <a:lumMod val="105000"/>
+                <a:satMod val="109000"/>
+                <a:tint val="81000"/>
+              </a:schemeClr>
+            </a:gs>
+          </a:gsLst>
+          <a:lin ang="5400000" scaled="0"/>
+        </a:gradFill>
+        <a:gradFill rotWithShape="1">
+          <a:gsLst>
+            <a:gs pos="0">
+              <a:schemeClr val="phClr">
+                <a:satMod val="103000"/>
+                <a:lumMod val="102000"/>
+                <a:tint val="94000"/>
+              </a:schemeClr>
+            </a:gs>
+            <a:gs pos="50000">
+              <a:schemeClr val="phClr">
+                <a:satMod val="110000"/>
+                <a:lumMod val="100000"/>
+                <a:shade val="100000"/>
+              </a:schemeClr>
+            </a:gs>
+            <a:gs pos="100000">
+              <a:schemeClr val="phClr">
+                <a:lumMod val="99000"/>
+                <a:satMod val="120000"/>
+                <a:shade val="78000"/>
+              </a:schemeClr>
+            </a:gs>
+          </a:gsLst>
+          <a:lin ang="5400000" scaled="0"/>
+        </a:gradFill>
+      </a:fillStyleLst>
+      <a:lnStyleLst>
+        <a:ln w="12700" cap="flat" cmpd="sng" algn="ctr">
+          <a:solidFill>
+            <a:schemeClr val="phClr"/>
+          </a:solidFill>
+          <a:prstDash val="solid"/>
+          <a:miter lim="800000"/>
+        </a:ln>
+        <a:ln w="19050" cap="flat" cmpd="sng" algn="ctr">
+          <a:solidFill>
+            <a:schemeClr val="phClr"/>
+          </a:solidFill>
+          <a:prstDash val="solid"/>
+          <a:miter lim="800000"/>
+        </a:ln>
+        <a:ln w="25400" cap="flat" cmpd="sng" algn="ctr">
+          <a:solidFill>
+            <a:schemeClr val="phClr"/>
+          </a:solidFill>
+          <a:prstDash val="solid"/>
+          <a:miter lim="800000"/>
+        </a:ln>
+      </a:lnStyleLst>
+      <a:effectStyleLst>
+        <a:effectStyle>
+          <a:effectLst/>
+        </a:effectStyle>
+        <a:effectStyle>
+          <a:effectLst/>
+        </a:effectStyle>
+        <a:effectStyle>
+          <a:effectLst>
+            <a:outerShdw blurRad="57150" dist="19050" dir="5400000" algn="ctr" rotWithShape="0">
+              <a:srgbClr val="000000">
+                <a:alpha val="63000"/>
+              </a:srgbClr>
+            </a:outerShdw>
+          </a:effectLst>
+        </a:effectStyle>
+      </a:effectStyleLst>
+      <a:bgFillStyleLst>
+        <a:solidFill>
+          <a:schemeClr val="phClr"/>
+        </a:solidFill>
+        <a:solidFill>
+          <a:schemeClr val="phClr">
+            <a:tint val="95000"/>
+            <a:satMod val="170000"/>
+          </a:schemeClr>
+        </a:solidFill>
+        <a:gradFill rotWithShape="1">
+          <a:gsLst>
+            <a:gs pos="0">
+              <a:schemeClr val="phClr">
+                <a:tint val="93000"/>
+                <a:satMod val="150000"/>
+                <a:shade val="98000"/>
+                <a:lumMod val="102000"/>
+              </a:schemeClr>
+            </a:gs>
+            <a:gs pos="50000">
+              <a:schemeClr val="phClr">
+                <a:tint val="98000"/>
+                <a:satMod val="130000"/>
+                <a:shade val="90000"/>
+                <a:lumMod val="103000"/>
+              </a:schemeClr>
+            </a:gs>
+            <a:gs pos="100000">
+              <a:schemeClr val="phClr">
+                <a:shade val="63000"/>
+                <a:satMod val="120000"/>
+              </a:schemeClr>
+            </a:gs>
+          </a:gsLst>
+          <a:lin ang="5400000" scaled="0"/>
+        </a:gradFill>
+      </a:bgFillStyleLst>
+    </a:fmtScheme>
+  </a:themeElements>
+  <a:objectDefaults>
+    <a:lnDef>
+      <a:spPr/>
+      <a:bodyPr/>
+      <a:lstStyle/>
+      <a:style>
+        <a:lnRef idx="2">
+          <a:schemeClr val="accent1"/>
+        </a:lnRef>
+        <a:fillRef idx="0">
+          <a:schemeClr val="accent1"/>
+        </a:fillRef>
+        <a:effectRef idx="1">
+          <a:schemeClr val="accent1"/>
+        </a:effectRef>
+        <a:fontRef idx="minor">
+          <a:schemeClr val="tx1"/>
+        </a:fontRef>
+      </a:style>
+    </a:lnDef>
+  </a:objectDefaults>
+  <a:extraClrSchemeLst/>
+  <a:extLst>
+    <a:ext uri="{05A4C25C-085E-4340-85A3-A5531E510DB2}">
+      <thm15:themeFamily xmlns:thm15="http://schemas.microsoft.com/office/thememl/2012/main" name="Office Theme" id="{2E142A2C-CD16-42D6-873A-C26D2A0506FA}" vid="{1BDDFF52-6CD6-40A5-AB3C-68EB2F1E4D0A}"/>
+    </a:ext>
+  </a:extLst>
+</a:theme>
 </file>